--- a/out/WiFi_Eltex_WEP-2AC_план_лист14.pptx
+++ b/out/WiFi_Eltex_WEP-2AC_план_лист14.pptx
@@ -13,6 +13,7 @@
     <p:sldId id="261" r:id="rId12"/>
     <p:sldId id="262" r:id="rId13"/>
     <p:sldId id="263" r:id="rId14"/>
+    <p:sldId id="264" r:id="rId15"/>
   </p:sldIdLst>
   <p:sldSz cx="12191695" cy="6858000" type="screen4x3"/>
   <p:notesSz cx="6858000" cy="9144000"/>
@@ -3110,7 +3111,7 @@
             <a:avLst/>
           </a:prstGeom>
           <a:solidFill>
-            <a:srgbClr val="1F2A44"/>
+            <a:srgbClr val="0B3D91"/>
           </a:solidFill>
           <a:ln>
             <a:noFill/>
@@ -3146,8 +3147,8 @@
         </p:nvSpPr>
         <p:spPr>
           <a:xfrm>
-            <a:off x="731520" y="2103120"/>
-            <a:ext cx="10698480" cy="2377440"/>
+            <a:off x="914400" y="2103120"/>
+            <a:ext cx="10332720" cy="1463040"/>
           </a:xfrm>
           <a:prstGeom prst="rect">
             <a:avLst/>
@@ -3155,11 +3156,16 @@
           <a:noFill/>
         </p:spPr>
         <p:txBody>
-          <a:bodyPr wrap="none">
+          <a:bodyPr wrap="square">
             <a:spAutoFit/>
           </a:bodyPr>
           <a:lstStyle/>
           <a:p>
+            <a:pPr>
+              <a:spcAft>
+                <a:spcPts val="400"/>
+              </a:spcAft>
+            </a:pPr>
             <a:r>
               <a:rPr sz="4000" b="1">
                 <a:solidFill>
@@ -3169,26 +3175,116 @@
               <a:t>Проект сети Wi-Fi учебного центра</a:t>
             </a:r>
           </a:p>
-          <a:p>
-            <a:r>
-              <a:rPr sz="2000">
+        </p:txBody>
+      </p:sp>
+      <p:sp>
+        <p:nvSpPr>
+          <p:cNvPr id="4" name="TextBox 3"/>
+          <p:cNvSpPr txBox="1"/>
+          <p:nvPr/>
+        </p:nvSpPr>
+        <p:spPr>
+          <a:xfrm>
+            <a:off x="914400" y="3108960"/>
+            <a:ext cx="10332720" cy="1645920"/>
+          </a:xfrm>
+          <a:prstGeom prst="rect">
+            <a:avLst/>
+          </a:prstGeom>
+          <a:noFill/>
+        </p:spPr>
+        <p:txBody>
+          <a:bodyPr wrap="square">
+            <a:spAutoFit/>
+          </a:bodyPr>
+          <a:lstStyle/>
+          <a:p>
+            <a:pPr>
+              <a:spcAft>
+                <a:spcPts val="400"/>
+              </a:spcAft>
+            </a:pPr>
+            <a:r>
+              <a:rPr sz="1800" b="0">
                 <a:solidFill>
-                  <a:srgbClr val="BFD7E6"/>
+                  <a:srgbClr val="D5E0F5"/>
                 </a:solidFill>
               </a:rPr>
-              <a:t>Расчёт размещения точек доступа Eltex WEP-2AC Smart
-Зоны покрытия 2.4 и 5 ГГц — план этажа, лист 14 (27.03.26 АР)</a:t>
-            </a:r>
-          </a:p>
-          <a:p>
-            <a:r>
-              <a:rPr sz="1400">
+              <a:t>Расчёт размещения точек доступа Eltex WEP-2AC Smart</a:t>
+            </a:r>
+          </a:p>
+          <a:p>
+            <a:pPr>
+              <a:spcAft>
+                <a:spcPts val="400"/>
+              </a:spcAft>
+            </a:pPr>
+            <a:r>
+              <a:rPr sz="1800" b="0">
                 <a:solidFill>
-                  <a:srgbClr val="8FAFC4"/>
+                  <a:srgbClr val="D5E0F5"/>
                 </a:solidFill>
               </a:rPr>
-              <a:t>9 точек доступа · железобетонные перекрытия с базальтовым наполнением · октябрь 2026</a:t>
-            </a:r>
+              <a:t>Зоны покрытия 2.4 и 5 ГГц · план этажа, лист 14 (АР, 27.03.26)</a:t>
+            </a:r>
+          </a:p>
+          <a:p>
+            <a:pPr>
+              <a:spcAft>
+                <a:spcPts val="400"/>
+              </a:spcAft>
+            </a:pPr>
+            <a:r>
+              <a:rPr sz="1800" b="0">
+                <a:solidFill>
+                  <a:srgbClr val="D5E0F5"/>
+                </a:solidFill>
+              </a:rPr>
+              <a:t>Перекрытия и стены — железобетон с базальтовым наполнением</a:t>
+            </a:r>
+          </a:p>
+        </p:txBody>
+      </p:sp>
+      <p:sp>
+        <p:nvSpPr>
+          <p:cNvPr id="5" name="Rectangle 4"/>
+          <p:cNvSpPr/>
+          <p:nvPr/>
+        </p:nvSpPr>
+        <p:spPr>
+          <a:xfrm>
+            <a:off x="914400" y="2971800"/>
+            <a:ext cx="2926080" cy="38100"/>
+          </a:xfrm>
+          <a:prstGeom prst="rect">
+            <a:avLst/>
+          </a:prstGeom>
+          <a:solidFill>
+            <a:srgbClr val="FFFFFF"/>
+          </a:solidFill>
+          <a:ln>
+            <a:noFill/>
+          </a:ln>
+        </p:spPr>
+        <p:style>
+          <a:lnRef idx="1">
+            <a:schemeClr val="accent1"/>
+          </a:lnRef>
+          <a:fillRef idx="3">
+            <a:schemeClr val="accent1"/>
+          </a:fillRef>
+          <a:effectRef idx="2">
+            <a:schemeClr val="accent1"/>
+          </a:effectRef>
+          <a:fontRef idx="minor">
+            <a:schemeClr val="lt1"/>
+          </a:fontRef>
+        </p:style>
+        <p:txBody>
+          <a:bodyPr rtlCol="0" anchor="ctr"/>
+          <a:lstStyle/>
+          <a:p>
+            <a:pPr algn="ctr"/>
           </a:p>
         </p:txBody>
       </p:sp>
@@ -3212,14 +3308,65 @@
       <p:grpSpPr/>
       <p:sp>
         <p:nvSpPr>
-          <p:cNvPr id="2" name="TextBox 1"/>
+          <p:cNvPr id="2" name="Rectangle 1"/>
+          <p:cNvSpPr/>
+          <p:nvPr/>
+        </p:nvSpPr>
+        <p:spPr>
+          <a:xfrm>
+            <a:off x="0" y="0"/>
+            <a:ext cx="12191695" cy="822960"/>
+          </a:xfrm>
+          <a:prstGeom prst="rect">
+            <a:avLst/>
+          </a:prstGeom>
+          <a:solidFill>
+            <a:srgbClr val="0B3D91"/>
+          </a:solidFill>
+          <a:ln>
+            <a:noFill/>
+          </a:ln>
+        </p:spPr>
+        <p:style>
+          <a:lnRef idx="1">
+            <a:schemeClr val="accent1"/>
+          </a:lnRef>
+          <a:fillRef idx="3">
+            <a:schemeClr val="accent1"/>
+          </a:fillRef>
+          <a:effectRef idx="2">
+            <a:schemeClr val="accent1"/>
+          </a:effectRef>
+          <a:fontRef idx="minor">
+            <a:schemeClr val="lt1"/>
+          </a:fontRef>
+        </p:style>
+        <p:txBody>
+          <a:bodyPr rtlCol="0" anchor="ctr" lIns="365760" tIns="109728"/>
+          <a:lstStyle/>
+          <a:p>
+            <a:pPr algn="ctr"/>
+            <a:r>
+              <a:rPr sz="2400" b="1">
+                <a:solidFill>
+                  <a:srgbClr val="FFFFFF"/>
+                </a:solidFill>
+              </a:rPr>
+              <a:t>Исходные данные</a:t>
+            </a:r>
+          </a:p>
+        </p:txBody>
+      </p:sp>
+      <p:sp>
+        <p:nvSpPr>
+          <p:cNvPr id="3" name="TextBox 2"/>
           <p:cNvSpPr txBox="1"/>
           <p:nvPr/>
         </p:nvSpPr>
         <p:spPr>
           <a:xfrm>
-            <a:off x="457200" y="228600"/>
-            <a:ext cx="11247120" cy="822960"/>
+            <a:off x="365760" y="868680"/>
+            <a:ext cx="11460175" cy="365760"/>
           </a:xfrm>
           <a:prstGeom prst="rect">
             <a:avLst/>
@@ -3233,36 +3380,276 @@
           <a:lstStyle/>
           <a:p>
             <a:r>
-              <a:rPr sz="2800" b="1">
+              <a:rPr sz="1200" i="1">
                 <a:solidFill>
-                  <a:srgbClr val="1F2A44"/>
+                  <a:srgbClr val="222A35"/>
                 </a:solidFill>
               </a:rPr>
-              <a:t>Исходные данные</a:t>
-            </a:r>
-          </a:p>
-          <a:p>
-            <a:r>
-              <a:rPr sz="1300">
-                <a:solidFill>
-                  <a:srgbClr val="5A5A5A"/>
-                </a:solidFill>
-              </a:rPr>
-              <a:t>Лист 14 «План этажа», 27.03.26 АР</a:t>
+              <a:t>План этажа 30,0 × 27,0 м по листу 14 АР; 18 помещений; высоты и материалы из ведомости конструкций</a:t>
             </a:r>
           </a:p>
         </p:txBody>
       </p:sp>
+      <p:graphicFrame>
+        <p:nvGraphicFramePr>
+          <p:cNvPr id="4" name="Table 3"/>
+          <p:cNvGraphicFramePr>
+            <a:graphicFrameLocks noGrp="1"/>
+          </p:cNvGraphicFramePr>
+          <p:nvPr/>
+        </p:nvGraphicFramePr>
+        <p:xfrm>
+          <a:off x="457200" y="1463040"/>
+          <a:ext cx="11247120" cy="4206240"/>
+        </p:xfrm>
+        <a:graphic>
+          <a:graphicData uri="http://schemas.openxmlformats.org/drawingml/2006/table">
+            <a:tbl>
+              <a:tblPr firstRow="1" bandRow="1">
+                <a:tableStyleId>{5C22544A-7EE6-4342-B048-85BDC9FD1C3A}</a:tableStyleId>
+              </a:tblPr>
+              <a:tblGrid>
+                <a:gridCol w="3108960"/>
+                <a:gridCol w="8138160"/>
+              </a:tblGrid>
+              <a:tr h="701040">
+                <a:tc>
+                  <a:txBody>
+                    <a:bodyPr/>
+                    <a:lstStyle/>
+                    <a:p>
+                      <a:r>
+                        <a:rPr sz="1400" b="1">
+                          <a:solidFill>
+                            <a:srgbClr val="FFFFFF"/>
+                          </a:solidFill>
+                        </a:rPr>
+                        <a:t>Параметр</a:t>
+                      </a:r>
+                    </a:p>
+                  </a:txBody>
+                  <a:tcPr>
+                    <a:solidFill>
+                      <a:srgbClr val="0B3D91"/>
+                    </a:solidFill>
+                  </a:tcPr>
+                </a:tc>
+                <a:tc>
+                  <a:txBody>
+                    <a:bodyPr/>
+                    <a:lstStyle/>
+                    <a:p>
+                      <a:r>
+                        <a:rPr sz="1400" b="1">
+                          <a:solidFill>
+                            <a:srgbClr val="FFFFFF"/>
+                          </a:solidFill>
+                        </a:rPr>
+                        <a:t>Значение</a:t>
+                      </a:r>
+                    </a:p>
+                  </a:txBody>
+                  <a:tcPr>
+                    <a:solidFill>
+                      <a:srgbClr val="0B3D91"/>
+                    </a:solidFill>
+                  </a:tcPr>
+                </a:tc>
+              </a:tr>
+              <a:tr h="701040">
+                <a:tc>
+                  <a:txBody>
+                    <a:bodyPr/>
+                    <a:lstStyle/>
+                    <a:p>
+                      <a:r>
+                        <a:rPr sz="1300" b="1"/>
+                        <a:t>Этаж / габариты</a:t>
+                      </a:r>
+                    </a:p>
+                  </a:txBody>
+                  <a:tcPr>
+                    <a:solidFill>
+                      <a:srgbClr val="F2F4F8"/>
+                    </a:solidFill>
+                  </a:tcPr>
+                </a:tc>
+                <a:tc>
+                  <a:txBody>
+                    <a:bodyPr/>
+                    <a:lstStyle/>
+                    <a:p>
+                      <a:r>
+                        <a:rPr sz="1300" b="0"/>
+                        <a:t>30,0 × 27,0 м (≈810 м² по контуру), высота этажа 4,8 м</a:t>
+                      </a:r>
+                    </a:p>
+                  </a:txBody>
+                  <a:tcPr>
+                    <a:solidFill>
+                      <a:srgbClr val="F2F4F8"/>
+                    </a:solidFill>
+                  </a:tcPr>
+                </a:tc>
+              </a:tr>
+              <a:tr h="701040">
+                <a:tc>
+                  <a:txBody>
+                    <a:bodyPr/>
+                    <a:lstStyle/>
+                    <a:p>
+                      <a:r>
+                        <a:rPr sz="1300" b="1"/>
+                        <a:t>Несущие конструкции</a:t>
+                      </a:r>
+                    </a:p>
+                  </a:txBody>
+                  <a:tcPr>
+                    <a:solidFill>
+                      <a:srgbClr val="FFFFFF"/>
+                    </a:solidFill>
+                  </a:tcPr>
+                </a:tc>
+                <a:tc>
+                  <a:txBody>
+                    <a:bodyPr/>
+                    <a:lstStyle/>
+                    <a:p>
+                      <a:r>
+                        <a:rPr sz="1300" b="0"/>
+                        <a:t>Монолитный ЖБ каркас; перекрытия 300 мм; стены 200 мм с базальтовым наполнением и арматурой</a:t>
+                      </a:r>
+                    </a:p>
+                  </a:txBody>
+                  <a:tcPr>
+                    <a:solidFill>
+                      <a:srgbClr val="FFFFFF"/>
+                    </a:solidFill>
+                  </a:tcPr>
+                </a:tc>
+              </a:tr>
+              <a:tr h="701040">
+                <a:tc>
+                  <a:txBody>
+                    <a:bodyPr/>
+                    <a:lstStyle/>
+                    <a:p>
+                      <a:r>
+                        <a:rPr sz="1300" b="1"/>
+                        <a:t>Модель AP</a:t>
+                      </a:r>
+                    </a:p>
+                  </a:txBody>
+                  <a:tcPr>
+                    <a:solidFill>
+                      <a:srgbClr val="F2F4F8"/>
+                    </a:solidFill>
+                  </a:tcPr>
+                </a:tc>
+                <a:tc>
+                  <a:txBody>
+                    <a:bodyPr/>
+                    <a:lstStyle/>
+                    <a:p>
+                      <a:r>
+                        <a:rPr sz="1300" b="0"/>
+                        <a:t>Eltex WEP-2AC Smart: 2×2 MIMO, 2.4 ГГц (802.11n) + 5 ГГц (802.11ac), Tx ≤ 20 дБм, PoE 802.3af</a:t>
+                      </a:r>
+                    </a:p>
+                  </a:txBody>
+                  <a:tcPr>
+                    <a:solidFill>
+                      <a:srgbClr val="F2F4F8"/>
+                    </a:solidFill>
+                  </a:tcPr>
+                </a:tc>
+              </a:tr>
+              <a:tr h="701040">
+                <a:tc>
+                  <a:txBody>
+                    <a:bodyPr/>
+                    <a:lstStyle/>
+                    <a:p>
+                      <a:r>
+                        <a:rPr sz="1300" b="1"/>
+                        <a:t>Клиенты</a:t>
+                      </a:r>
+                    </a:p>
+                  </a:txBody>
+                  <a:tcPr>
+                    <a:solidFill>
+                      <a:srgbClr val="FFFFFF"/>
+                    </a:solidFill>
+                  </a:tcPr>
+                </a:tc>
+                <a:tc>
+                  <a:txBody>
+                    <a:bodyPr/>
+                    <a:lstStyle/>
+                    <a:p>
+                      <a:r>
+                        <a:rPr sz="1300" b="0"/>
+                        <a:t>Ноутбуки/телефоны, приём −70 дБм как минимум качества (видео, VoWiFi)</a:t>
+                      </a:r>
+                    </a:p>
+                  </a:txBody>
+                  <a:tcPr>
+                    <a:solidFill>
+                      <a:srgbClr val="FFFFFF"/>
+                    </a:solidFill>
+                  </a:tcPr>
+                </a:tc>
+              </a:tr>
+              <a:tr h="701040">
+                <a:tc>
+                  <a:txBody>
+                    <a:bodyPr/>
+                    <a:lstStyle/>
+                    <a:p>
+                      <a:r>
+                        <a:rPr sz="1300" b="1"/>
+                        <a:t>Число точек</a:t>
+                      </a:r>
+                    </a:p>
+                  </a:txBody>
+                  <a:tcPr>
+                    <a:solidFill>
+                      <a:srgbClr val="F2F4F8"/>
+                    </a:solidFill>
+                  </a:tcPr>
+                </a:tc>
+                <a:tc>
+                  <a:txBody>
+                    <a:bodyPr/>
+                    <a:lstStyle/>
+                    <a:p>
+                      <a:r>
+                        <a:rPr sz="1300" b="0"/>
+                        <a:t>11 AP (проектное решение, см. слайды 5–8)</a:t>
+                      </a:r>
+                    </a:p>
+                  </a:txBody>
+                  <a:tcPr>
+                    <a:solidFill>
+                      <a:srgbClr val="F2F4F8"/>
+                    </a:solidFill>
+                  </a:tcPr>
+                </a:tc>
+              </a:tr>
+            </a:tbl>
+          </a:graphicData>
+        </a:graphic>
+      </p:graphicFrame>
       <p:sp>
         <p:nvSpPr>
-          <p:cNvPr id="3" name="TextBox 2"/>
+          <p:cNvPr id="5" name="TextBox 4"/>
           <p:cNvSpPr txBox="1"/>
           <p:nvPr/>
         </p:nvSpPr>
         <p:spPr>
           <a:xfrm>
-            <a:off x="548640" y="1188720"/>
-            <a:ext cx="5577840" cy="5120640"/>
+            <a:off x="457200" y="5943600"/>
+            <a:ext cx="11247120" cy="731520"/>
           </a:xfrm>
           <a:prstGeom prst="rect">
             <a:avLst/>
@@ -3275,103 +3662,18 @@
           </a:bodyPr>
           <a:lstStyle/>
           <a:p>
-            <a:pPr/>
-            <a:r>
-              <a:rPr sz="1500"/>
-              <a:t>• Здание: учебный центр, 18 помещений, габариты этажа ≈ 26×18 м</a:t>
-            </a:r>
-          </a:p>
-          <a:p>
-            <a:pPr/>
-            <a:r>
-              <a:rPr sz="1500"/>
-              <a:t>• Конструктив: монолитный ЖБК каркас; перекрытия 300 мм, стены 200 мм, наполнение — базальтовое волокно, двойное армирование</a:t>
-            </a:r>
-          </a:p>
-          <a:p>
-            <a:pPr/>
-            <a:r>
-              <a:rPr sz="1500"/>
-              <a:t>• Высота потолка ~3 м — точка на потолке, высота монтажа 2,7–3,0 м</a:t>
-            </a:r>
-          </a:p>
-          <a:p>
-            <a:pPr/>
-            <a:r>
-              <a:rPr sz="1500"/>
-              <a:t>• Клиенты: ноутбуки, смартфоны, планшеты (класс приёма ≥ −70 дБм)</a:t>
-            </a:r>
-          </a:p>
-          <a:p>
-            <a:pPr/>
-            <a:r>
-              <a:rPr sz="1500"/>
-              <a:t>• Точки доступа: Eltex WEP-2AC Smart (2×2 MIMO, dual-band concurrent, PoE 802.3af)</a:t>
-            </a:r>
-          </a:p>
-        </p:txBody>
-      </p:sp>
-      <p:sp>
-        <p:nvSpPr>
-          <p:cNvPr id="4" name="TextBox 3"/>
-          <p:cNvSpPr txBox="1"/>
-          <p:nvPr/>
-        </p:nvSpPr>
-        <p:spPr>
-          <a:xfrm>
-            <a:off x="6400800" y="1188720"/>
-            <a:ext cx="5303520" cy="5120640"/>
-          </a:xfrm>
-          <a:prstGeom prst="rect">
-            <a:avLst/>
-          </a:prstGeom>
-          <a:noFill/>
-        </p:spPr>
-        <p:txBody>
-          <a:bodyPr wrap="square">
-            <a:spAutoFit/>
-          </a:bodyPr>
-          <a:lstStyle/>
-          <a:p>
-            <a:pPr/>
-            <a:r>
-              <a:rPr sz="1500"/>
-              <a:t>• Особенности распространения в ЖБ с базальтом:</a:t>
-            </a:r>
-          </a:p>
-          <a:p>
-            <a:pPr lvl="1"/>
-            <a:r>
-              <a:rPr sz="1400"/>
-              <a:t>– затухание одной несущей стены ≈ 12 дБ @ 2,4 ГГц / ≈ 20 дБ @ 5 ГГц</a:t>
-            </a:r>
-          </a:p>
-          <a:p>
-            <a:pPr lvl="1"/>
-            <a:r>
-              <a:rPr sz="1400"/>
-              <a:t>– коэффициент потерь в помещении n = 2,7 (2,4 ГГц) / 3,0 (5 ГГц)</a:t>
-            </a:r>
-          </a:p>
-          <a:p>
-            <a:pPr lvl="1"/>
-            <a:r>
-              <a:rPr sz="1400"/>
-              <a:t>– через коридор = 2 стены: −24 дБ (2,4) / −40 дБ (5)</a:t>
-            </a:r>
-          </a:p>
-          <a:p>
-            <a:pPr/>
-            <a:r>
-              <a:rPr sz="1500"/>
-              <a:t>• Санузлы/мокрые зоны и техпомещения экранируют сигнал сильнее обычных стен</a:t>
-            </a:r>
-          </a:p>
-          <a:p>
-            <a:pPr/>
-            <a:r>
-              <a:rPr sz="1500"/>
-              <a:t>• Серверная (№14) — AP внутри помещения, выделенный SSID управления</a:t>
+            <a:pPr>
+              <a:spcAft>
+                <a:spcPts val="400"/>
+              </a:spcAft>
+            </a:pPr>
+            <a:r>
+              <a:rPr sz="1200" b="0">
+                <a:solidFill>
+                  <a:srgbClr val="222A35"/>
+                </a:solidFill>
+              </a:rPr>
+              <a:t>Затухание в конструкциях (литература + запас): ЖБ стена с базальтом ≈ 12 дБ @2,4 ГГц / ≈ 20 дБ @5 ГГц; перекрытие при размещении AP на этом же этаже не учитывается.</a:t>
             </a:r>
           </a:p>
         </p:txBody>
@@ -3396,30 +3698,48 @@
       <p:grpSpPr/>
       <p:sp>
         <p:nvSpPr>
-          <p:cNvPr id="2" name="TextBox 1"/>
-          <p:cNvSpPr txBox="1"/>
+          <p:cNvPr id="2" name="Rectangle 1"/>
+          <p:cNvSpPr/>
           <p:nvPr/>
         </p:nvSpPr>
         <p:spPr>
           <a:xfrm>
-            <a:off x="457200" y="228600"/>
-            <a:ext cx="11247120" cy="822960"/>
+            <a:off x="0" y="0"/>
+            <a:ext cx="12191695" cy="822960"/>
           </a:xfrm>
           <a:prstGeom prst="rect">
             <a:avLst/>
           </a:prstGeom>
-          <a:noFill/>
+          <a:solidFill>
+            <a:srgbClr val="0B3D91"/>
+          </a:solidFill>
+          <a:ln>
+            <a:noFill/>
+          </a:ln>
         </p:spPr>
+        <p:style>
+          <a:lnRef idx="1">
+            <a:schemeClr val="accent1"/>
+          </a:lnRef>
+          <a:fillRef idx="3">
+            <a:schemeClr val="accent1"/>
+          </a:fillRef>
+          <a:effectRef idx="2">
+            <a:schemeClr val="accent1"/>
+          </a:effectRef>
+          <a:fontRef idx="minor">
+            <a:schemeClr val="lt1"/>
+          </a:fontRef>
+        </p:style>
         <p:txBody>
-          <a:bodyPr wrap="none">
-            <a:spAutoFit/>
-          </a:bodyPr>
+          <a:bodyPr rtlCol="0" anchor="ctr" lIns="365760" tIns="109728"/>
           <a:lstStyle/>
           <a:p>
-            <a:r>
-              <a:rPr sz="2800" b="1">
+            <a:pPr algn="ctr"/>
+            <a:r>
+              <a:rPr sz="2400" b="1">
                 <a:solidFill>
-                  <a:srgbClr val="1F2A44"/>
+                  <a:srgbClr val="FFFFFF"/>
                 </a:solidFill>
               </a:rPr>
               <a:t>Методика радиопланирования</a:t>
@@ -3435,8 +3755,8 @@
         </p:nvSpPr>
         <p:spPr>
           <a:xfrm>
-            <a:off x="548640" y="1188720"/>
-            <a:ext cx="11155680" cy="5303520"/>
+            <a:off x="457200" y="1280160"/>
+            <a:ext cx="11247120" cy="5029200"/>
           </a:xfrm>
           <a:prstGeom prst="rect">
             <a:avLst/>
@@ -3449,59 +3769,78 @@
           </a:bodyPr>
           <a:lstStyle/>
           <a:p>
-            <a:pPr/>
-            <a:r>
-              <a:rPr sz="1500"/>
-              <a:t>• Расчётная модель RSS:  L = Ptx − FSPL(d) − (n−2)·10·lg(d) − k·ATT_стены</a:t>
-            </a:r>
-          </a:p>
-          <a:p>
-            <a:pPr lvl="1"/>
-            <a:r>
-              <a:rPr sz="1400"/>
-              <a:t>– Ptx = 20 дБм (Eltex WEP-2AC Smart, EIRP до 23 дБм учтён с запасом на антенну 2 дБи)</a:t>
-            </a:r>
-          </a:p>
-          <a:p>
-            <a:pPr lvl="1"/>
-            <a:r>
-              <a:rPr sz="1400"/>
-              <a:t>– FSPL — свободное пространство: 40 дБ @2,4 ГГц / 47 дБ @5 ГГц на 1 м</a:t>
-            </a:r>
-          </a:p>
-          <a:p>
-            <a:pPr lvl="1"/>
-            <a:r>
-              <a:rPr sz="1400"/>
-              <a:t>– k — число пересечённых стен по лучу «точка → приёмник» (граф помещений из DXF-геометрии плана)</a:t>
-            </a:r>
-          </a:p>
-          <a:p>
-            <a:pPr/>
-            <a:r>
-              <a:rPr sz="1500"/>
-              <a:t>• Сетка расчёта 0,25 м поверх векторной геометрии листа 14; калибровка план→метры по экспликации</a:t>
-            </a:r>
-          </a:p>
-          <a:p>
-            <a:pPr/>
-            <a:r>
-              <a:rPr sz="1500"/>
-              <a:t>• Критерии качества: ≥ −60 дБм отлично · ≥ −67 хорошо · ≥ −70 приемлемо (порог клиентов) · &lt; −75 вне_service</a:t>
-            </a:r>
-          </a:p>
-          <a:p>
-            <a:pPr/>
-            <a:r>
-              <a:rPr sz="1500"/>
-              <a:t>• Целевая загрузка: основной трафик — 5 ГГц в пределах одного помещения; 2,4 ГГц — резерв/IoT/дальние зоны</a:t>
-            </a:r>
-          </a:p>
-          <a:p>
-            <a:pPr/>
-            <a:r>
-              <a:rPr sz="1500"/>
-              <a:t>• Роуминг: 802.11k/v, каналы чередуются 1/6/11 (2,4) и 36/40/44/48/149/153 (5), мощность снижена до уровня ‹перекрываемого› соседом на −75 дБм</a:t>
+            <a:pPr>
+              <a:spcAft>
+                <a:spcPts val="400"/>
+              </a:spcAft>
+            </a:pPr>
+            <a:r>
+              <a:rPr sz="1400" b="0">
+                <a:solidFill>
+                  <a:srgbClr val="222A35"/>
+                </a:solidFill>
+              </a:rPr>
+              <a:t>1. Геометрия. Векторное извлечение линий стен листа 14 PDF → калибровка по размерным цепям (30 000 × 27 000 мм) → модель в метрах; площади помещений сверены с экспликацией (расхождение &lt; 8% — толщины стен).</a:t>
+            </a:r>
+          </a:p>
+          <a:p>
+            <a:pPr>
+              <a:spcAft>
+                <a:spcPts val="400"/>
+              </a:spcAft>
+            </a:pPr>
+            <a:r>
+              <a:rPr sz="1400" b="0">
+                <a:solidFill>
+                  <a:srgbClr val="222A35"/>
+                </a:solidFill>
+              </a:rPr>
+              <a:t>2. Распространение. RSS = Ptx + Ga − FSPL(d) − (n−2)·10·lg d − k·Aстены, где FSPL = 32,44 + 20·lg f(МГц) + 20·lg d(км); n = 2,7 (2,4 ГГц) / 3,2 (5 ГГц); Aстены = 12 / 20 дБ; k — число пересечений луча «AP→точка» со стенами (ray-casting по растровой модели пола, шаг 5 см).</a:t>
+            </a:r>
+          </a:p>
+          <a:p>
+            <a:pPr>
+              <a:spcAft>
+                <a:spcPts val="400"/>
+              </a:spcAft>
+            </a:pPr>
+            <a:r>
+              <a:rPr sz="1400" b="0">
+                <a:solidFill>
+                  <a:srgbClr val="222A35"/>
+                </a:solidFill>
+              </a:rPr>
+              <a:t>3. Сетка расчёта. ~45 000 точек внутри всех 18 помещений (шаг 0,35 м); для каждой точки берётся лучший AP (roaming-критерий strongest signal).</a:t>
+            </a:r>
+          </a:p>
+          <a:p>
+            <a:pPr>
+              <a:spcAft>
+                <a:spcPts val="400"/>
+              </a:spcAft>
+            </a:pPr>
+            <a:r>
+              <a:rPr sz="1400" b="0">
+                <a:solidFill>
+                  <a:srgbClr val="222A35"/>
+                </a:solidFill>
+              </a:rPr>
+              <a:t>4. Критерии. ≥ −60 дБм отлично; ≥ −67 хорошо; порог проекта −70 дБм. Покрытие = доля площади помещения выше порога.</a:t>
+            </a:r>
+          </a:p>
+          <a:p>
+            <a:pPr>
+              <a:spcAft>
+                <a:spcPts val="400"/>
+              </a:spcAft>
+            </a:pPr>
+            <a:r>
+              <a:rPr sz="1400" b="0">
+                <a:solidFill>
+                  <a:srgbClr val="222A35"/>
+                </a:solidFill>
+              </a:rPr>
+              <a:t>5. Оптимизация. Размещение AP вручную по центру помещений + контроль минимума по дальним углам; для широких классов (№12, №13) и коридора — по две точки.</a:t>
             </a:r>
           </a:p>
         </p:txBody>
@@ -3526,14 +3865,65 @@
       <p:grpSpPr/>
       <p:sp>
         <p:nvSpPr>
-          <p:cNvPr id="2" name="TextBox 1"/>
+          <p:cNvPr id="2" name="Rectangle 1"/>
+          <p:cNvSpPr/>
+          <p:nvPr/>
+        </p:nvSpPr>
+        <p:spPr>
+          <a:xfrm>
+            <a:off x="0" y="0"/>
+            <a:ext cx="12191695" cy="822960"/>
+          </a:xfrm>
+          <a:prstGeom prst="rect">
+            <a:avLst/>
+          </a:prstGeom>
+          <a:solidFill>
+            <a:srgbClr val="0B3D91"/>
+          </a:solidFill>
+          <a:ln>
+            <a:noFill/>
+          </a:ln>
+        </p:spPr>
+        <p:style>
+          <a:lnRef idx="1">
+            <a:schemeClr val="accent1"/>
+          </a:lnRef>
+          <a:fillRef idx="3">
+            <a:schemeClr val="accent1"/>
+          </a:fillRef>
+          <a:effectRef idx="2">
+            <a:schemeClr val="accent1"/>
+          </a:effectRef>
+          <a:fontRef idx="minor">
+            <a:schemeClr val="lt1"/>
+          </a:fontRef>
+        </p:style>
+        <p:txBody>
+          <a:bodyPr rtlCol="0" anchor="ctr" lIns="365760" tIns="109728"/>
+          <a:lstStyle/>
+          <a:p>
+            <a:pPr algn="ctr"/>
+            <a:r>
+              <a:rPr sz="2400" b="1">
+                <a:solidFill>
+                  <a:srgbClr val="FFFFFF"/>
+                </a:solidFill>
+              </a:rPr>
+              <a:t>Схема размещения 11 точек доступа</a:t>
+            </a:r>
+          </a:p>
+        </p:txBody>
+      </p:sp>
+      <p:sp>
+        <p:nvSpPr>
+          <p:cNvPr id="3" name="TextBox 2"/>
           <p:cNvSpPr txBox="1"/>
           <p:nvPr/>
         </p:nvSpPr>
         <p:spPr>
           <a:xfrm>
-            <a:off x="457200" y="228600"/>
-            <a:ext cx="11247120" cy="822960"/>
+            <a:off x="365760" y="868680"/>
+            <a:ext cx="11460175" cy="365760"/>
           </a:xfrm>
           <a:prstGeom prst="rect">
             <a:avLst/>
@@ -3547,29 +3937,19 @@
           <a:lstStyle/>
           <a:p>
             <a:r>
-              <a:rPr sz="2800" b="1">
+              <a:rPr sz="1200" i="1">
                 <a:solidFill>
-                  <a:srgbClr val="1F2A44"/>
+                  <a:srgbClr val="222A35"/>
                 </a:solidFill>
               </a:rPr>
-              <a:t>Карта покрытия 2,4 ГГц</a:t>
-            </a:r>
-          </a:p>
-          <a:p>
-            <a:r>
-              <a:rPr sz="1300">
-                <a:solidFill>
-                  <a:srgbClr val="5A5A5A"/>
-                </a:solidFill>
-              </a:rPr>
-              <a:t>9 точек Eltex WEP-2AC Smart · пороги −60/−67/−70 дБм</a:t>
+              <a:t>Контур здания, стены, номера помещений 1–18, позиции AP (координаты от левого нижнего угла плана)</a:t>
             </a:r>
           </a:p>
         </p:txBody>
       </p:sp>
       <p:pic>
         <p:nvPicPr>
-          <p:cNvPr id="3" name="Picture 2" descr="wifi_map_24.png"/>
+          <p:cNvPr id="4" name="Picture 3" descr="check_geom.png"/>
           <p:cNvPicPr>
             <a:picLocks noChangeAspect="1"/>
           </p:cNvPicPr>
@@ -3583,65 +3963,14 @@
         </p:blipFill>
         <p:spPr>
           <a:xfrm>
-            <a:off x="365760" y="1143000"/>
-            <a:ext cx="8412480" cy="6839415"/>
+            <a:off x="2148840" y="1234440"/>
+            <a:ext cx="6900530" cy="5394960"/>
           </a:xfrm>
           <a:prstGeom prst="rect">
             <a:avLst/>
           </a:prstGeom>
         </p:spPr>
       </p:pic>
-      <p:sp>
-        <p:nvSpPr>
-          <p:cNvPr id="4" name="TextBox 3"/>
-          <p:cNvSpPr txBox="1"/>
-          <p:nvPr/>
-        </p:nvSpPr>
-        <p:spPr>
-          <a:xfrm>
-            <a:off x="8961120" y="1188720"/>
-            <a:ext cx="3017520" cy="5303520"/>
-          </a:xfrm>
-          <a:prstGeom prst="rect">
-            <a:avLst/>
-          </a:prstGeom>
-          <a:noFill/>
-        </p:spPr>
-        <p:txBody>
-          <a:bodyPr wrap="square">
-            <a:spAutoFit/>
-          </a:bodyPr>
-          <a:lstStyle/>
-          <a:p>
-            <a:pPr/>
-            <a:r>
-              <a:rPr sz="1300"/>
-              <a:t>• Учебные/рабочие зоны: 97,8% площади ≥ −70 дБм</a:t>
-            </a:r>
-          </a:p>
-          <a:p>
-            <a:pPr/>
-            <a:r>
-              <a:rPr sz="1300"/>
-              <a:t>• Худшие точки — дальние углы склада СИЗ (№10): −71 дБм</a:t>
-            </a:r>
-          </a:p>
-          <a:p>
-            <a:pPr/>
-            <a:r>
-              <a:rPr sz="1300"/>
-              <a:t>• Каждое помещение получает ≥ −60 дБм в своей зоне от «домашней» AP</a:t>
-            </a:r>
-          </a:p>
-          <a:p>
-            <a:pPr/>
-            <a:r>
-              <a:rPr sz="1300"/>
-              <a:t>• Пересечение сот соседних комнат держим ≤ −72 дБм — чтобы клиент не «залипал» на чужой AP</a:t>
-            </a:r>
-          </a:p>
-        </p:txBody>
-      </p:sp>
     </p:spTree>
   </p:cSld>
   <p:clrMapOvr>
@@ -3662,14 +3991,65 @@
       <p:grpSpPr/>
       <p:sp>
         <p:nvSpPr>
-          <p:cNvPr id="2" name="TextBox 1"/>
+          <p:cNvPr id="2" name="Rectangle 1"/>
+          <p:cNvSpPr/>
+          <p:nvPr/>
+        </p:nvSpPr>
+        <p:spPr>
+          <a:xfrm>
+            <a:off x="0" y="0"/>
+            <a:ext cx="12191695" cy="822960"/>
+          </a:xfrm>
+          <a:prstGeom prst="rect">
+            <a:avLst/>
+          </a:prstGeom>
+          <a:solidFill>
+            <a:srgbClr val="0B3D91"/>
+          </a:solidFill>
+          <a:ln>
+            <a:noFill/>
+          </a:ln>
+        </p:spPr>
+        <p:style>
+          <a:lnRef idx="1">
+            <a:schemeClr val="accent1"/>
+          </a:lnRef>
+          <a:fillRef idx="3">
+            <a:schemeClr val="accent1"/>
+          </a:fillRef>
+          <a:effectRef idx="2">
+            <a:schemeClr val="accent1"/>
+          </a:effectRef>
+          <a:fontRef idx="minor">
+            <a:schemeClr val="lt1"/>
+          </a:fontRef>
+        </p:style>
+        <p:txBody>
+          <a:bodyPr rtlCol="0" anchor="ctr" lIns="365760" tIns="109728"/>
+          <a:lstStyle/>
+          <a:p>
+            <a:pPr algn="ctr"/>
+            <a:r>
+              <a:rPr sz="2400" b="1">
+                <a:solidFill>
+                  <a:srgbClr val="FFFFFF"/>
+                </a:solidFill>
+              </a:rPr>
+              <a:t>Зона покрытия 2,4 ГГц</a:t>
+            </a:r>
+          </a:p>
+        </p:txBody>
+      </p:sp>
+      <p:sp>
+        <p:nvSpPr>
+          <p:cNvPr id="3" name="TextBox 2"/>
           <p:cNvSpPr txBox="1"/>
           <p:nvPr/>
         </p:nvSpPr>
         <p:spPr>
           <a:xfrm>
-            <a:off x="457200" y="228600"/>
-            <a:ext cx="11247120" cy="822960"/>
+            <a:off x="365760" y="868680"/>
+            <a:ext cx="11460175" cy="365760"/>
           </a:xfrm>
           <a:prstGeom prst="rect">
             <a:avLst/>
@@ -3683,29 +4063,19 @@
           <a:lstStyle/>
           <a:p>
             <a:r>
-              <a:rPr sz="2800" b="1">
+              <a:rPr sz="1200" i="1">
                 <a:solidFill>
-                  <a:srgbClr val="1F2A44"/>
+                  <a:srgbClr val="222A35"/>
                 </a:solidFill>
               </a:rPr>
-              <a:t>Карта покрытия 5 ГГц</a:t>
-            </a:r>
-          </a:p>
-          <a:p>
-            <a:r>
-              <a:rPr sz="1300">
-                <a:solidFill>
-                  <a:srgbClr val="5A5A5A"/>
-                </a:solidFill>
-              </a:rPr>
-              <a:t>Затухание в ЖБ-стенах +8 дБ относительно 2,4 ГГц</a:t>
+              <a:t>Тепловая карта RSSI поверх плана; рабочие помещения — 100% площади ≥ −70 дБм, по зданию 96,6%</a:t>
             </a:r>
           </a:p>
         </p:txBody>
       </p:sp>
       <p:pic>
         <p:nvPicPr>
-          <p:cNvPr id="3" name="Picture 2" descr="wifi_map_5.png"/>
+          <p:cNvPr id="4" name="Picture 3" descr="wifi_map_24.png"/>
           <p:cNvPicPr>
             <a:picLocks noChangeAspect="1"/>
           </p:cNvPicPr>
@@ -3719,58 +4089,14 @@
         </p:blipFill>
         <p:spPr>
           <a:xfrm>
-            <a:off x="365760" y="1143000"/>
-            <a:ext cx="8412480" cy="6839415"/>
+            <a:off x="1920240" y="1188720"/>
+            <a:ext cx="7156174" cy="5486400"/>
           </a:xfrm>
           <a:prstGeom prst="rect">
             <a:avLst/>
           </a:prstGeom>
         </p:spPr>
       </p:pic>
-      <p:sp>
-        <p:nvSpPr>
-          <p:cNvPr id="4" name="TextBox 3"/>
-          <p:cNvSpPr txBox="1"/>
-          <p:nvPr/>
-        </p:nvSpPr>
-        <p:spPr>
-          <a:xfrm>
-            <a:off x="8961120" y="1188720"/>
-            <a:ext cx="3017520" cy="5303520"/>
-          </a:xfrm>
-          <a:prstGeom prst="rect">
-            <a:avLst/>
-          </a:prstGeom>
-          <a:noFill/>
-        </p:spPr>
-        <p:txBody>
-          <a:bodyPr wrap="square">
-            <a:spAutoFit/>
-          </a:bodyPr>
-          <a:lstStyle/>
-          <a:p>
-            <a:pPr/>
-            <a:r>
-              <a:rPr sz="1300"/>
-              <a:t>• Покрытие 5 ГГц ограничено пределами помещения установки AP (73,9% нормируемых зон ≥ −70 дБм)</a:t>
-            </a:r>
-          </a:p>
-          <a:p>
-            <a:pPr/>
-            <a:r>
-              <a:rPr sz="1300"/>
-              <a:t>• Через одну ЖБ-стену 5 ГГц деградирует до −80…−90 дБм — межкомнатный роуминг планируем на 2,4 ГГц</a:t>
-            </a:r>
-          </a:p>
-          <a:p>
-            <a:pPr/>
-            <a:r>
-              <a:rPr sz="1300"/>
-              <a:t>• Внутри классов и коридора — уверенные −35…−50 дБм: приоритет полосы именно здесь</a:t>
-            </a:r>
-          </a:p>
-        </p:txBody>
-      </p:sp>
     </p:spTree>
   </p:cSld>
   <p:clrMapOvr>
@@ -3791,14 +4117,65 @@
       <p:grpSpPr/>
       <p:sp>
         <p:nvSpPr>
-          <p:cNvPr id="2" name="TextBox 1"/>
+          <p:cNvPr id="2" name="Rectangle 1"/>
+          <p:cNvSpPr/>
+          <p:nvPr/>
+        </p:nvSpPr>
+        <p:spPr>
+          <a:xfrm>
+            <a:off x="0" y="0"/>
+            <a:ext cx="12191695" cy="822960"/>
+          </a:xfrm>
+          <a:prstGeom prst="rect">
+            <a:avLst/>
+          </a:prstGeom>
+          <a:solidFill>
+            <a:srgbClr val="0B3D91"/>
+          </a:solidFill>
+          <a:ln>
+            <a:noFill/>
+          </a:ln>
+        </p:spPr>
+        <p:style>
+          <a:lnRef idx="1">
+            <a:schemeClr val="accent1"/>
+          </a:lnRef>
+          <a:fillRef idx="3">
+            <a:schemeClr val="accent1"/>
+          </a:fillRef>
+          <a:effectRef idx="2">
+            <a:schemeClr val="accent1"/>
+          </a:effectRef>
+          <a:fontRef idx="minor">
+            <a:schemeClr val="lt1"/>
+          </a:fontRef>
+        </p:style>
+        <p:txBody>
+          <a:bodyPr rtlCol="0" anchor="ctr" lIns="365760" tIns="109728"/>
+          <a:lstStyle/>
+          <a:p>
+            <a:pPr algn="ctr"/>
+            <a:r>
+              <a:rPr sz="2400" b="1">
+                <a:solidFill>
+                  <a:srgbClr val="FFFFFF"/>
+                </a:solidFill>
+              </a:rPr>
+              <a:t>Зона покрытия 5 ГГц</a:t>
+            </a:r>
+          </a:p>
+        </p:txBody>
+      </p:sp>
+      <p:sp>
+        <p:nvSpPr>
+          <p:cNvPr id="3" name="TextBox 2"/>
           <p:cNvSpPr txBox="1"/>
           <p:nvPr/>
         </p:nvSpPr>
         <p:spPr>
           <a:xfrm>
-            <a:off x="457200" y="228600"/>
-            <a:ext cx="11247120" cy="822960"/>
+            <a:off x="365760" y="868680"/>
+            <a:ext cx="11460175" cy="365760"/>
           </a:xfrm>
           <a:prstGeom prst="rect">
             <a:avLst/>
@@ -3812,408 +4189,40 @@
           <a:lstStyle/>
           <a:p>
             <a:r>
-              <a:rPr sz="2800" b="1">
+              <a:rPr sz="1200" i="1">
                 <a:solidFill>
-                  <a:srgbClr val="1F2A44"/>
+                  <a:srgbClr val="222A35"/>
                 </a:solidFill>
               </a:rPr>
-              <a:t>Размещение точек доступа — комментарий по каждой</a:t>
+              <a:t>Приоритетный диапазон внутри помещений; сквозь 2+ ЖБ стены приём ниже порога — это ожидаемо и компенсируется 2,4 ГГц</a:t>
             </a:r>
           </a:p>
         </p:txBody>
       </p:sp>
-      <p:graphicFrame>
-        <p:nvGraphicFramePr>
-          <p:cNvPr id="3" name="Table 2"/>
-          <p:cNvGraphicFramePr>
-            <a:graphicFrameLocks noGrp="1"/>
-          </p:cNvGraphicFramePr>
+      <p:pic>
+        <p:nvPicPr>
+          <p:cNvPr id="4" name="Picture 3" descr="wifi_map_5.png"/>
+          <p:cNvPicPr>
+            <a:picLocks noChangeAspect="1"/>
+          </p:cNvPicPr>
           <p:nvPr/>
-        </p:nvGraphicFramePr>
-        <p:xfrm>
-          <a:off x="365760" y="1143000"/>
-          <a:ext cx="11430000" cy="5394960"/>
-        </p:xfrm>
-        <a:graphic>
-          <a:graphicData uri="http://schemas.openxmlformats.org/drawingml/2006/table">
-            <a:tbl>
-              <a:tblPr firstRow="1" bandRow="1">
-                <a:tableStyleId>{5C22544A-7EE6-4342-B048-85BDC9FD1C3A}</a:tableStyleId>
-              </a:tblPr>
-              <a:tblGrid>
-                <a:gridCol w="914400"/>
-                <a:gridCol w="2834640"/>
-                <a:gridCol w="7680960"/>
-              </a:tblGrid>
-              <a:tr h="539496">
-                <a:tc>
-                  <a:txBody>
-                    <a:bodyPr/>
-                    <a:lstStyle/>
-                    <a:p>
-                      <a:r>
-                        <a:rPr b="1" sz="1200"/>
-                        <a:t>AP</a:t>
-                      </a:r>
-                    </a:p>
-                  </a:txBody>
-                  <a:tcPr/>
-                </a:tc>
-                <a:tc>
-                  <a:txBody>
-                    <a:bodyPr/>
-                    <a:lstStyle/>
-                    <a:p>
-                      <a:r>
-                        <a:rPr b="1" sz="1200"/>
-                        <a:t>Точка установки</a:t>
-                      </a:r>
-                    </a:p>
-                  </a:txBody>
-                  <a:tcPr/>
-                </a:tc>
-                <a:tc>
-                  <a:txBody>
-                    <a:bodyPr/>
-                    <a:lstStyle/>
-                    <a:p>
-                      <a:r>
-                        <a:rPr b="1" sz="1200"/>
-                        <a:t>Комментарий</a:t>
-                      </a:r>
-                    </a:p>
-                  </a:txBody>
-                  <a:tcPr/>
-                </a:tc>
-              </a:tr>
-              <a:tr h="539496">
-                <a:tc>
-                  <a:txBody>
-                    <a:bodyPr/>
-                    <a:lstStyle/>
-                    <a:p>
-                      <a:r>
-                        <a:rPr sz="1100" b="1"/>
-                        <a:t>AP-1</a:t>
-                      </a:r>
-                    </a:p>
-                  </a:txBody>
-                  <a:tcPr/>
-                </a:tc>
-                <a:tc>
-                  <a:txBody>
-                    <a:bodyPr/>
-                    <a:lstStyle/>
-                    <a:p/>
-                  </a:txBody>
-                  <a:tcPr/>
-                </a:tc>
-                <a:tc>
-                  <a:txBody>
-                    <a:bodyPr/>
-                    <a:lstStyle/>
-                    <a:p>
-                      <a:r>
-                        <a:rPr sz="1000"/>
-                        <a:t>Кабинет №1 (3,6×8,0 м), потолок по центру. Покрывает кабинет специалистов УТЦ (−34 дБм) и через тамбур — раздевалку №11 (−64 дБм); гардероб №6 обслуживает с уровнем −54 дБм.</a:t>
-                      </a:r>
-                    </a:p>
-                  </a:txBody>
-                  <a:tcPr/>
-                </a:tc>
-              </a:tr>
-              <a:tr h="539496">
-                <a:tc>
-                  <a:txBody>
-                    <a:bodyPr/>
-                    <a:lstStyle/>
-                    <a:p>
-                      <a:r>
-                        <a:rPr sz="1100" b="1"/>
-                        <a:t>AP-2</a:t>
-                      </a:r>
-                    </a:p>
-                  </a:txBody>
-                  <a:tcPr/>
-                </a:tc>
-                <a:tc>
-                  <a:txBody>
-                    <a:bodyPr/>
-                    <a:lstStyle/>
-                    <a:p/>
-                  </a:txBody>
-                  <a:tcPr/>
-                </a:tc>
-                <a:tc>
-                  <a:txBody>
-                    <a:bodyPr/>
-                    <a:lstStyle/>
-                    <a:p>
-                      <a:r>
-                        <a:rPr sz="1000"/>
-                        <a:t>Кабинет преподавателей №2 (3,1×2,7 м). Малое помещение, один AP с избытком (−25 дБм); мощность снизить до −6 дБм во избежание overplotting.</a:t>
-                      </a:r>
-                    </a:p>
-                  </a:txBody>
-                  <a:tcPr/>
-                </a:tc>
-              </a:tr>
-              <a:tr h="539496">
-                <a:tc>
-                  <a:txBody>
-                    <a:bodyPr/>
-                    <a:lstStyle/>
-                    <a:p>
-                      <a:r>
-                        <a:rPr sz="1100" b="1"/>
-                        <a:t>AP-3</a:t>
-                      </a:r>
-                    </a:p>
-                  </a:txBody>
-                  <a:tcPr/>
-                </a:tc>
-                <a:tc>
-                  <a:txBody>
-                    <a:bodyPr/>
-                    <a:lstStyle/>
-                    <a:p/>
-                  </a:txBody>
-                  <a:tcPr/>
-                </a:tc>
-                <a:tc>
-                  <a:txBody>
-                    <a:bodyPr/>
-                    <a:lstStyle/>
-                    <a:p>
-                      <a:r>
-                        <a:rPr sz="1000"/>
-                        <a:t>Класс ПК №3 (S=90,8 м², вытянутый 3,1×5,1 по сетке — фактически зал). Центральный монтаж, 2×2 MIMO достаточно для плотности до ~40 клиентов.</a:t>
-                      </a:r>
-                    </a:p>
-                  </a:txBody>
-                  <a:tcPr/>
-                </a:tc>
-              </a:tr>
-              <a:tr h="539496">
-                <a:tc>
-                  <a:txBody>
-                    <a:bodyPr/>
-                    <a:lstStyle/>
-                    <a:p>
-                      <a:r>
-                        <a:rPr sz="1100" b="1"/>
-                        <a:t>AP-4</a:t>
-                      </a:r>
-                    </a:p>
-                  </a:txBody>
-                  <a:tcPr/>
-                </a:tc>
-                <a:tc>
-                  <a:txBody>
-                    <a:bodyPr/>
-                    <a:lstStyle/>
-                    <a:p/>
-                  </a:txBody>
-                  <a:tcPr/>
-                </a:tc>
-                <a:tc>
-                  <a:txBody>
-                    <a:bodyPr/>
-                    <a:lstStyle/>
-                    <a:p>
-                      <a:r>
-                        <a:rPr sz="1000"/>
-                        <a:t>Класс ТЭС УЭЦН №4 (6,2×7,3 м). Центр комнаты, уровень −34 дБм в среднем; станки/стенды экранируют — проверять посты у дальней стены (не ниже −60).</a:t>
-                      </a:r>
-                    </a:p>
-                  </a:txBody>
-                  <a:tcPr/>
-                </a:tc>
-              </a:tr>
-              <a:tr h="539496">
-                <a:tc>
-                  <a:txBody>
-                    <a:bodyPr/>
-                    <a:lstStyle/>
-                    <a:p>
-                      <a:r>
-                        <a:rPr sz="1100" b="1"/>
-                        <a:t>AP-5</a:t>
-                      </a:r>
-                    </a:p>
-                  </a:txBody>
-                  <a:tcPr/>
-                </a:tc>
-                <a:tc>
-                  <a:txBody>
-                    <a:bodyPr/>
-                    <a:lstStyle/>
-                    <a:p/>
-                  </a:txBody>
-                  <a:tcPr/>
-                </a:tc>
-                <a:tc>
-                  <a:txBody>
-                    <a:bodyPr/>
-                    <a:lstStyle/>
-                    <a:p>
-                      <a:r>
-                        <a:rPr sz="1000"/>
-                        <a:t>Класс корп. обучения №3 (№5, 3,8×7,3 м). Монтаж над рабочей зоной, ближе к середине длинной оси; −32 дБм.</a:t>
-                      </a:r>
-                    </a:p>
-                  </a:txBody>
-                  <a:tcPr/>
-                </a:tc>
-              </a:tr>
-              <a:tr h="539496">
-                <a:tc>
-                  <a:txBody>
-                    <a:bodyPr/>
-                    <a:lstStyle/>
-                    <a:p>
-                      <a:r>
-                        <a:rPr sz="1100" b="1"/>
-                        <a:t>AP-12w</a:t>
-                      </a:r>
-                    </a:p>
-                  </a:txBody>
-                  <a:tcPr/>
-                </a:tc>
-                <a:tc>
-                  <a:txBody>
-                    <a:bodyPr/>
-                    <a:lstStyle/>
-                    <a:p/>
-                  </a:txBody>
-                  <a:tcPr/>
-                </a:tc>
-                <a:tc>
-                  <a:txBody>
-                    <a:bodyPr/>
-                    <a:lstStyle/>
-                    <a:p>
-                      <a:r>
-                        <a:rPr sz="1000"/>
-                        <a:t>Западная половина большого класса №12 (11,8×8,3 м). Один AP не покрывает ширину зала через внутренние ЖБ-колонны — зал разрезан на две соты.</a:t>
-                      </a:r>
-                    </a:p>
-                  </a:txBody>
-                  <a:tcPr/>
-                </a:tc>
-              </a:tr>
-              <a:tr h="539496">
-                <a:tc>
-                  <a:txBody>
-                    <a:bodyPr/>
-                    <a:lstStyle/>
-                    <a:p>
-                      <a:r>
-                        <a:rPr sz="1100" b="1"/>
-                        <a:t>AP-12e</a:t>
-                      </a:r>
-                    </a:p>
-                  </a:txBody>
-                  <a:tcPr/>
-                </a:tc>
-                <a:tc>
-                  <a:txBody>
-                    <a:bodyPr/>
-                    <a:lstStyle/>
-                    <a:p/>
-                  </a:txBody>
-                  <a:tcPr/>
-                </a:tc>
-                <a:tc>
-                  <a:txBody>
-                    <a:bodyPr/>
-                    <a:lstStyle/>
-                    <a:p>
-                      <a:r>
-                        <a:rPr sz="1000"/>
-                        <a:t>Восточная половина класса №12 и класс №13 (S=130 м²): −36…−48 дБм; обеспечивает смежные склад-архив №16 (−51 дБм) и ИТП как источник помех учитывается.</a:t>
-                      </a:r>
-                    </a:p>
-                  </a:txBody>
-                  <a:tcPr/>
-                </a:tc>
-              </a:tr>
-              <a:tr h="539496">
-                <a:tc>
-                  <a:txBody>
-                    <a:bodyPr/>
-                    <a:lstStyle/>
-                    <a:p>
-                      <a:r>
-                        <a:rPr sz="1100" b="1"/>
-                        <a:t>AP-18w</a:t>
-                      </a:r>
-                    </a:p>
-                  </a:txBody>
-                  <a:tcPr/>
-                </a:tc>
-                <a:tc>
-                  <a:txBody>
-                    <a:bodyPr/>
-                    <a:lstStyle/>
-                    <a:p/>
-                  </a:txBody>
-                  <a:tcPr/>
-                </a:tc>
-                <a:tc>
-                  <a:txBody>
-                    <a:bodyPr/>
-                    <a:lstStyle/>
-                    <a:p>
-                      <a:r>
-                        <a:rPr sz="1000"/>
-                        <a:t>Коридор №18 (9,0×2,8 м), западная треть. «Дальнобойная» сота: гардероб, раздевалка, техпомещение; −29 дБм в коридоре.</a:t>
-                      </a:r>
-                    </a:p>
-                  </a:txBody>
-                  <a:tcPr/>
-                </a:tc>
-              </a:tr>
-              <a:tr h="539496">
-                <a:tc>
-                  <a:txBody>
-                    <a:bodyPr/>
-                    <a:lstStyle/>
-                    <a:p>
-                      <a:r>
-                        <a:rPr sz="1100" b="1"/>
-                        <a:t>AP-18e</a:t>
-                      </a:r>
-                    </a:p>
-                  </a:txBody>
-                  <a:tcPr/>
-                </a:tc>
-                <a:tc>
-                  <a:txBody>
-                    <a:bodyPr/>
-                    <a:lstStyle/>
-                    <a:p/>
-                  </a:txBody>
-                  <a:tcPr/>
-                </a:tc>
-                <a:tc>
-                  <a:txBody>
-                    <a:bodyPr/>
-                    <a:lstStyle/>
-                    <a:p>
-                      <a:r>
-                        <a:rPr sz="1000"/>
-                        <a:t>Коридор, восточная треть, рядом с серверной №14 и электрощитовой №15. Серверная получает −56 дБм (для мониторинга/AP-управления этого достаточно).</a:t>
-                      </a:r>
-                    </a:p>
-                  </a:txBody>
-                  <a:tcPr/>
-                </a:tc>
-              </a:tr>
-            </a:tbl>
-          </a:graphicData>
-        </a:graphic>
-      </p:graphicFrame>
+        </p:nvPicPr>
+        <p:blipFill>
+          <a:blip r:embed="rId2"/>
+          <a:stretch>
+            <a:fillRect/>
+          </a:stretch>
+        </p:blipFill>
+        <p:spPr>
+          <a:xfrm>
+            <a:off x="1920240" y="1188720"/>
+            <a:ext cx="7156174" cy="5486400"/>
+          </a:xfrm>
+          <a:prstGeom prst="rect">
+            <a:avLst/>
+          </a:prstGeom>
+        </p:spPr>
+      </p:pic>
     </p:spTree>
   </p:cSld>
   <p:clrMapOvr>
@@ -4234,14 +4243,65 @@
       <p:grpSpPr/>
       <p:sp>
         <p:nvSpPr>
-          <p:cNvPr id="2" name="TextBox 1"/>
+          <p:cNvPr id="2" name="Rectangle 1"/>
+          <p:cNvSpPr/>
+          <p:nvPr/>
+        </p:nvSpPr>
+        <p:spPr>
+          <a:xfrm>
+            <a:off x="0" y="0"/>
+            <a:ext cx="12191695" cy="822960"/>
+          </a:xfrm>
+          <a:prstGeom prst="rect">
+            <a:avLst/>
+          </a:prstGeom>
+          <a:solidFill>
+            <a:srgbClr val="0B3D91"/>
+          </a:solidFill>
+          <a:ln>
+            <a:noFill/>
+          </a:ln>
+        </p:spPr>
+        <p:style>
+          <a:lnRef idx="1">
+            <a:schemeClr val="accent1"/>
+          </a:lnRef>
+          <a:fillRef idx="3">
+            <a:schemeClr val="accent1"/>
+          </a:fillRef>
+          <a:effectRef idx="2">
+            <a:schemeClr val="accent1"/>
+          </a:effectRef>
+          <a:fontRef idx="minor">
+            <a:schemeClr val="lt1"/>
+          </a:fontRef>
+        </p:style>
+        <p:txBody>
+          <a:bodyPr rtlCol="0" anchor="ctr" lIns="365760" tIns="109728"/>
+          <a:lstStyle/>
+          <a:p>
+            <a:pPr algn="ctr"/>
+            <a:r>
+              <a:rPr sz="2400" b="1">
+                <a:solidFill>
+                  <a:srgbClr val="FFFFFF"/>
+                </a:solidFill>
+              </a:rPr>
+              <a:t>Уровни сигнала по помещениям</a:t>
+            </a:r>
+          </a:p>
+        </p:txBody>
+      </p:sp>
+      <p:sp>
+        <p:nvSpPr>
+          <p:cNvPr id="3" name="TextBox 2"/>
           <p:cNvSpPr txBox="1"/>
           <p:nvPr/>
         </p:nvSpPr>
         <p:spPr>
           <a:xfrm>
-            <a:off x="457200" y="228600"/>
-            <a:ext cx="11247120" cy="822960"/>
+            <a:off x="365760" y="868680"/>
+            <a:ext cx="11460175" cy="365760"/>
           </a:xfrm>
           <a:prstGeom prst="rect">
             <a:avLst/>
@@ -4255,37 +4315,27 @@
           <a:lstStyle/>
           <a:p>
             <a:r>
-              <a:rPr sz="2800" b="1">
+              <a:rPr sz="1200" i="1">
                 <a:solidFill>
-                  <a:srgbClr val="1F2A44"/>
+                  <a:srgbClr val="222A35"/>
                 </a:solidFill>
               </a:rPr>
-              <a:t>Уровни сигнала по помещениям</a:t>
-            </a:r>
-          </a:p>
-          <a:p>
-            <a:r>
-              <a:rPr sz="1300">
-                <a:solidFill>
-                  <a:srgbClr val="5A5A5A"/>
-                </a:solidFill>
-              </a:rPr>
-              <a:t>cp — средний RSS в комнате, min — худшая точка</a:t>
+              <a:t>Средний / минимальный RSSI и доля площади ≥ −70 дБм; статус: ✔ норма, ~ частичное, ✘ вне нормирования</a:t>
             </a:r>
           </a:p>
         </p:txBody>
       </p:sp>
       <p:graphicFrame>
         <p:nvGraphicFramePr>
-          <p:cNvPr id="3" name="Table 2"/>
+          <p:cNvPr id="4" name="Table 3"/>
           <p:cNvGraphicFramePr>
             <a:graphicFrameLocks noGrp="1"/>
           </p:cNvGraphicFramePr>
           <p:nvPr/>
         </p:nvGraphicFramePr>
         <p:xfrm>
-          <a:off x="365760" y="1097280"/>
-          <a:ext cx="9966960" cy="5486400"/>
+          <a:off x="320040" y="1325880"/>
+          <a:ext cx="11430000" cy="5120640"/>
         </p:xfrm>
         <a:graphic>
           <a:graphicData uri="http://schemas.openxmlformats.org/drawingml/2006/table">
@@ -4295,138 +4345,3482 @@
               </a:tblPr>
               <a:tblGrid>
                 <a:gridCol w="457200"/>
-                <a:gridCol w="3291840"/>
-                <a:gridCol w="1188720"/>
+                <a:gridCol w="3017520"/>
                 <a:gridCol w="822960"/>
-                <a:gridCol w="822960"/>
-                <a:gridCol w="822960"/>
-                <a:gridCol w="822960"/>
-                <a:gridCol w="822960"/>
-                <a:gridCol w="914400"/>
+                <a:gridCol w="1097280"/>
+                <a:gridCol w="960120"/>
+                <a:gridCol w="960120"/>
+                <a:gridCol w="1097280"/>
+                <a:gridCol w="960120"/>
+                <a:gridCol w="960120"/>
+                <a:gridCol w="1097280"/>
               </a:tblGrid>
-              <a:tr h="5486400">
-                <a:tc>
-                  <a:txBody>
-                    <a:bodyPr/>
-                    <a:lstStyle/>
-                    <a:p>
-                      <a:r>
-                        <a:rPr b="1" sz="1000"/>
+              <a:tr h="269507">
+                <a:tc>
+                  <a:txBody>
+                    <a:bodyPr/>
+                    <a:lstStyle/>
+                    <a:p>
+                      <a:r>
+                        <a:rPr sz="1100" b="1">
+                          <a:solidFill>
+                            <a:srgbClr val="FFFFFF"/>
+                          </a:solidFill>
+                        </a:rPr>
                         <a:t>№</a:t>
                       </a:r>
                     </a:p>
                   </a:txBody>
-                  <a:tcPr/>
-                </a:tc>
-                <a:tc>
-                  <a:txBody>
-                    <a:bodyPr/>
-                    <a:lstStyle/>
-                    <a:p>
-                      <a:r>
-                        <a:rPr b="1" sz="1000"/>
+                  <a:tcPr>
+                    <a:solidFill>
+                      <a:srgbClr val="0B3D91"/>
+                    </a:solidFill>
+                  </a:tcPr>
+                </a:tc>
+                <a:tc>
+                  <a:txBody>
+                    <a:bodyPr/>
+                    <a:lstStyle/>
+                    <a:p>
+                      <a:r>
+                        <a:rPr sz="1100" b="1">
+                          <a:solidFill>
+                            <a:srgbClr val="FFFFFF"/>
+                          </a:solidFill>
+                        </a:rPr>
                         <a:t>Помещение</a:t>
                       </a:r>
                     </a:p>
                   </a:txBody>
-                  <a:tcPr/>
-                </a:tc>
-                <a:tc>
-                  <a:txBody>
-                    <a:bodyPr/>
-                    <a:lstStyle/>
-                    <a:p>
-                      <a:r>
-                        <a:rPr b="1" sz="1000"/>
-                        <a:t>Размеры</a:t>
-                      </a:r>
-                    </a:p>
-                  </a:txBody>
-                  <a:tcPr/>
-                </a:tc>
-                <a:tc>
-                  <a:txBody>
-                    <a:bodyPr/>
-                    <a:lstStyle/>
-                    <a:p>
-                      <a:r>
-                        <a:rPr b="1" sz="1000"/>
+                  <a:tcPr>
+                    <a:solidFill>
+                      <a:srgbClr val="0B3D91"/>
+                    </a:solidFill>
+                  </a:tcPr>
+                </a:tc>
+                <a:tc>
+                  <a:txBody>
+                    <a:bodyPr/>
+                    <a:lstStyle/>
+                    <a:p>
+                      <a:r>
+                        <a:rPr sz="1100" b="1">
+                          <a:solidFill>
+                            <a:srgbClr val="FFFFFF"/>
+                          </a:solidFill>
+                        </a:rPr>
                         <a:t>S, м²</a:t>
                       </a:r>
                     </a:p>
                   </a:txBody>
-                  <a:tcPr/>
-                </a:tc>
-                <a:tc>
-                  <a:txBody>
-                    <a:bodyPr/>
-                    <a:lstStyle/>
-                    <a:p>
-                      <a:r>
-                        <a:rPr b="1" sz="1000"/>
-                        <a:t>2,4 ср</a:t>
-                      </a:r>
-                    </a:p>
-                  </a:txBody>
-                  <a:tcPr/>
-                </a:tc>
-                <a:tc>
-                  <a:txBody>
-                    <a:bodyPr/>
-                    <a:lstStyle/>
-                    <a:p>
-                      <a:r>
-                        <a:rPr b="1" sz="1000"/>
-                        <a:t>2,4 мин</a:t>
-                      </a:r>
-                    </a:p>
-                  </a:txBody>
-                  <a:tcPr/>
-                </a:tc>
-                <a:tc>
-                  <a:txBody>
-                    <a:bodyPr/>
-                    <a:lstStyle/>
-                    <a:p>
-                      <a:r>
-                        <a:rPr b="1" sz="1000"/>
-                        <a:t>5 ср</a:t>
-                      </a:r>
-                    </a:p>
-                  </a:txBody>
-                  <a:tcPr/>
-                </a:tc>
-                <a:tc>
-                  <a:txBody>
-                    <a:bodyPr/>
-                    <a:lstStyle/>
-                    <a:p>
-                      <a:r>
-                        <a:rPr b="1" sz="1000"/>
+                  <a:tcPr>
+                    <a:solidFill>
+                      <a:srgbClr val="0B3D91"/>
+                    </a:solidFill>
+                  </a:tcPr>
+                </a:tc>
+                <a:tc>
+                  <a:txBody>
+                    <a:bodyPr/>
+                    <a:lstStyle/>
+                    <a:p>
+                      <a:r>
+                        <a:rPr sz="1100" b="1">
+                          <a:solidFill>
+                            <a:srgbClr val="FFFFFF"/>
+                          </a:solidFill>
+                        </a:rPr>
+                        <a:t>AP</a:t>
+                      </a:r>
+                    </a:p>
+                  </a:txBody>
+                  <a:tcPr>
+                    <a:solidFill>
+                      <a:srgbClr val="0B3D91"/>
+                    </a:solidFill>
+                  </a:tcPr>
+                </a:tc>
+                <a:tc>
+                  <a:txBody>
+                    <a:bodyPr/>
+                    <a:lstStyle/>
+                    <a:p>
+                      <a:r>
+                        <a:rPr sz="1100" b="1">
+                          <a:solidFill>
+                            <a:srgbClr val="FFFFFF"/>
+                          </a:solidFill>
+                        </a:rPr>
+                        <a:t>2.4 сред</a:t>
+                      </a:r>
+                    </a:p>
+                  </a:txBody>
+                  <a:tcPr>
+                    <a:solidFill>
+                      <a:srgbClr val="0B3D91"/>
+                    </a:solidFill>
+                  </a:tcPr>
+                </a:tc>
+                <a:tc>
+                  <a:txBody>
+                    <a:bodyPr/>
+                    <a:lstStyle/>
+                    <a:p>
+                      <a:r>
+                        <a:rPr sz="1100" b="1">
+                          <a:solidFill>
+                            <a:srgbClr val="FFFFFF"/>
+                          </a:solidFill>
+                        </a:rPr>
+                        <a:t>2.4 мин</a:t>
+                      </a:r>
+                    </a:p>
+                  </a:txBody>
+                  <a:tcPr>
+                    <a:solidFill>
+                      <a:srgbClr val="0B3D91"/>
+                    </a:solidFill>
+                  </a:tcPr>
+                </a:tc>
+                <a:tc>
+                  <a:txBody>
+                    <a:bodyPr/>
+                    <a:lstStyle/>
+                    <a:p>
+                      <a:r>
+                        <a:rPr sz="1100" b="1">
+                          <a:solidFill>
+                            <a:srgbClr val="FFFFFF"/>
+                          </a:solidFill>
+                        </a:rPr>
+                        <a:t>2.4 покв.</a:t>
+                      </a:r>
+                    </a:p>
+                  </a:txBody>
+                  <a:tcPr>
+                    <a:solidFill>
+                      <a:srgbClr val="0B3D91"/>
+                    </a:solidFill>
+                  </a:tcPr>
+                </a:tc>
+                <a:tc>
+                  <a:txBody>
+                    <a:bodyPr/>
+                    <a:lstStyle/>
+                    <a:p>
+                      <a:r>
+                        <a:rPr sz="1100" b="1">
+                          <a:solidFill>
+                            <a:srgbClr val="FFFFFF"/>
+                          </a:solidFill>
+                        </a:rPr>
+                        <a:t>5 сред</a:t>
+                      </a:r>
+                    </a:p>
+                  </a:txBody>
+                  <a:tcPr>
+                    <a:solidFill>
+                      <a:srgbClr val="0B3D91"/>
+                    </a:solidFill>
+                  </a:tcPr>
+                </a:tc>
+                <a:tc>
+                  <a:txBody>
+                    <a:bodyPr/>
+                    <a:lstStyle/>
+                    <a:p>
+                      <a:r>
+                        <a:rPr sz="1100" b="1">
+                          <a:solidFill>
+                            <a:srgbClr val="FFFFFF"/>
+                          </a:solidFill>
+                        </a:rPr>
                         <a:t>5 мин</a:t>
                       </a:r>
                     </a:p>
                   </a:txBody>
-                  <a:tcPr/>
-                </a:tc>
-                <a:tc>
-                  <a:txBody>
-                    <a:bodyPr/>
-                    <a:lstStyle/>
-                    <a:p>
-                      <a:r>
-                        <a:rPr b="1" sz="1000"/>
-                        <a:t>AP</a:t>
-                      </a:r>
-                    </a:p>
-                  </a:txBody>
-                  <a:tcPr/>
+                  <a:tcPr>
+                    <a:solidFill>
+                      <a:srgbClr val="0B3D91"/>
+                    </a:solidFill>
+                  </a:tcPr>
+                </a:tc>
+                <a:tc>
+                  <a:txBody>
+                    <a:bodyPr/>
+                    <a:lstStyle/>
+                    <a:p>
+                      <a:r>
+                        <a:rPr sz="1100" b="1">
+                          <a:solidFill>
+                            <a:srgbClr val="FFFFFF"/>
+                          </a:solidFill>
+                        </a:rPr>
+                        <a:t>5 покв.</a:t>
+                      </a:r>
+                    </a:p>
+                  </a:txBody>
+                  <a:tcPr>
+                    <a:solidFill>
+                      <a:srgbClr val="0B3D91"/>
+                    </a:solidFill>
+                  </a:tcPr>
+                </a:tc>
+              </a:tr>
+              <a:tr h="269507">
+                <a:tc>
+                  <a:txBody>
+                    <a:bodyPr/>
+                    <a:lstStyle/>
+                    <a:p>
+                      <a:r>
+                        <a:rPr sz="1000" b="1">
+                          <a:solidFill>
+                            <a:srgbClr val="1E8A3C"/>
+                          </a:solidFill>
+                        </a:rPr>
+                        <a:t>1</a:t>
+                      </a:r>
+                    </a:p>
+                  </a:txBody>
+                  <a:tcPr>
+                    <a:solidFill>
+                      <a:srgbClr val="F2F4F8"/>
+                    </a:solidFill>
+                  </a:tcPr>
+                </a:tc>
+                <a:tc>
+                  <a:txBody>
+                    <a:bodyPr/>
+                    <a:lstStyle/>
+                    <a:p>
+                      <a:r>
+                        <a:rPr sz="1000"/>
+                        <a:t>Кабинет специалистов УТЦ</a:t>
+                      </a:r>
+                    </a:p>
+                  </a:txBody>
+                  <a:tcPr>
+                    <a:solidFill>
+                      <a:srgbClr val="F2F4F8"/>
+                    </a:solidFill>
+                  </a:tcPr>
+                </a:tc>
+                <a:tc>
+                  <a:txBody>
+                    <a:bodyPr/>
+                    <a:lstStyle/>
+                    <a:p>
+                      <a:r>
+                        <a:rPr sz="1000"/>
+                        <a:t>31</a:t>
+                      </a:r>
+                    </a:p>
+                  </a:txBody>
+                  <a:tcPr>
+                    <a:solidFill>
+                      <a:srgbClr val="F2F4F8"/>
+                    </a:solidFill>
+                  </a:tcPr>
+                </a:tc>
+                <a:tc>
+                  <a:txBody>
+                    <a:bodyPr/>
+                    <a:lstStyle/>
+                    <a:p>
+                      <a:r>
+                        <a:rPr sz="1000"/>
+                        <a:t>AP-1</a:t>
+                      </a:r>
+                    </a:p>
+                  </a:txBody>
+                  <a:tcPr>
+                    <a:solidFill>
+                      <a:srgbClr val="F2F4F8"/>
+                    </a:solidFill>
+                  </a:tcPr>
+                </a:tc>
+                <a:tc>
+                  <a:txBody>
+                    <a:bodyPr/>
+                    <a:lstStyle/>
+                    <a:p>
+                      <a:r>
+                        <a:rPr sz="1000"/>
+                        <a:t>-27</a:t>
+                      </a:r>
+                    </a:p>
+                  </a:txBody>
+                  <a:tcPr>
+                    <a:solidFill>
+                      <a:srgbClr val="F2F4F8"/>
+                    </a:solidFill>
+                  </a:tcPr>
+                </a:tc>
+                <a:tc>
+                  <a:txBody>
+                    <a:bodyPr/>
+                    <a:lstStyle/>
+                    <a:p>
+                      <a:r>
+                        <a:rPr sz="1000"/>
+                        <a:t>-36</a:t>
+                      </a:r>
+                    </a:p>
+                  </a:txBody>
+                  <a:tcPr>
+                    <a:solidFill>
+                      <a:srgbClr val="F2F4F8"/>
+                    </a:solidFill>
+                  </a:tcPr>
+                </a:tc>
+                <a:tc>
+                  <a:txBody>
+                    <a:bodyPr/>
+                    <a:lstStyle/>
+                    <a:p>
+                      <a:r>
+                        <a:rPr sz="1000"/>
+                        <a:t>100%</a:t>
+                      </a:r>
+                    </a:p>
+                  </a:txBody>
+                  <a:tcPr>
+                    <a:solidFill>
+                      <a:srgbClr val="F2F4F8"/>
+                    </a:solidFill>
+                  </a:tcPr>
+                </a:tc>
+                <a:tc>
+                  <a:txBody>
+                    <a:bodyPr/>
+                    <a:lstStyle/>
+                    <a:p>
+                      <a:r>
+                        <a:rPr sz="1000"/>
+                        <a:t>-35</a:t>
+                      </a:r>
+                    </a:p>
+                  </a:txBody>
+                  <a:tcPr>
+                    <a:solidFill>
+                      <a:srgbClr val="F2F4F8"/>
+                    </a:solidFill>
+                  </a:tcPr>
+                </a:tc>
+                <a:tc>
+                  <a:txBody>
+                    <a:bodyPr/>
+                    <a:lstStyle/>
+                    <a:p>
+                      <a:r>
+                        <a:rPr sz="1000"/>
+                        <a:t>-46</a:t>
+                      </a:r>
+                    </a:p>
+                  </a:txBody>
+                  <a:tcPr>
+                    <a:solidFill>
+                      <a:srgbClr val="F2F4F8"/>
+                    </a:solidFill>
+                  </a:tcPr>
+                </a:tc>
+                <a:tc>
+                  <a:txBody>
+                    <a:bodyPr/>
+                    <a:lstStyle/>
+                    <a:p>
+                      <a:r>
+                        <a:rPr sz="1000"/>
+                        <a:t>100%</a:t>
+                      </a:r>
+                    </a:p>
+                  </a:txBody>
+                  <a:tcPr>
+                    <a:solidFill>
+                      <a:srgbClr val="F2F4F8"/>
+                    </a:solidFill>
+                  </a:tcPr>
+                </a:tc>
+              </a:tr>
+              <a:tr h="269507">
+                <a:tc>
+                  <a:txBody>
+                    <a:bodyPr/>
+                    <a:lstStyle/>
+                    <a:p>
+                      <a:r>
+                        <a:rPr sz="1000" b="1">
+                          <a:solidFill>
+                            <a:srgbClr val="1E8A3C"/>
+                          </a:solidFill>
+                        </a:rPr>
+                        <a:t>2</a:t>
+                      </a:r>
+                    </a:p>
+                  </a:txBody>
+                  <a:tcPr>
+                    <a:solidFill>
+                      <a:srgbClr val="FFFFFF"/>
+                    </a:solidFill>
+                  </a:tcPr>
+                </a:tc>
+                <a:tc>
+                  <a:txBody>
+                    <a:bodyPr/>
+                    <a:lstStyle/>
+                    <a:p>
+                      <a:r>
+                        <a:rPr sz="1000"/>
+                        <a:t>Кабинет преподавателей</a:t>
+                      </a:r>
+                    </a:p>
+                  </a:txBody>
+                  <a:tcPr>
+                    <a:solidFill>
+                      <a:srgbClr val="FFFFFF"/>
+                    </a:solidFill>
+                  </a:tcPr>
+                </a:tc>
+                <a:tc>
+                  <a:txBody>
+                    <a:bodyPr/>
+                    <a:lstStyle/>
+                    <a:p>
+                      <a:r>
+                        <a:rPr sz="1000"/>
+                        <a:t>16</a:t>
+                      </a:r>
+                    </a:p>
+                  </a:txBody>
+                  <a:tcPr>
+                    <a:solidFill>
+                      <a:srgbClr val="FFFFFF"/>
+                    </a:solidFill>
+                  </a:tcPr>
+                </a:tc>
+                <a:tc>
+                  <a:txBody>
+                    <a:bodyPr/>
+                    <a:lstStyle/>
+                    <a:p>
+                      <a:r>
+                        <a:rPr sz="1000"/>
+                        <a:t>AP-2</a:t>
+                      </a:r>
+                    </a:p>
+                  </a:txBody>
+                  <a:tcPr>
+                    <a:solidFill>
+                      <a:srgbClr val="FFFFFF"/>
+                    </a:solidFill>
+                  </a:tcPr>
+                </a:tc>
+                <a:tc>
+                  <a:txBody>
+                    <a:bodyPr/>
+                    <a:lstStyle/>
+                    <a:p>
+                      <a:r>
+                        <a:rPr sz="1000"/>
+                        <a:t>-23</a:t>
+                      </a:r>
+                    </a:p>
+                  </a:txBody>
+                  <a:tcPr>
+                    <a:solidFill>
+                      <a:srgbClr val="FFFFFF"/>
+                    </a:solidFill>
+                  </a:tcPr>
+                </a:tc>
+                <a:tc>
+                  <a:txBody>
+                    <a:bodyPr/>
+                    <a:lstStyle/>
+                    <a:p>
+                      <a:r>
+                        <a:rPr sz="1000"/>
+                        <a:t>-32</a:t>
+                      </a:r>
+                    </a:p>
+                  </a:txBody>
+                  <a:tcPr>
+                    <a:solidFill>
+                      <a:srgbClr val="FFFFFF"/>
+                    </a:solidFill>
+                  </a:tcPr>
+                </a:tc>
+                <a:tc>
+                  <a:txBody>
+                    <a:bodyPr/>
+                    <a:lstStyle/>
+                    <a:p>
+                      <a:r>
+                        <a:rPr sz="1000"/>
+                        <a:t>100%</a:t>
+                      </a:r>
+                    </a:p>
+                  </a:txBody>
+                  <a:tcPr>
+                    <a:solidFill>
+                      <a:srgbClr val="FFFFFF"/>
+                    </a:solidFill>
+                  </a:tcPr>
+                </a:tc>
+                <a:tc>
+                  <a:txBody>
+                    <a:bodyPr/>
+                    <a:lstStyle/>
+                    <a:p>
+                      <a:r>
+                        <a:rPr sz="1000"/>
+                        <a:t>-30</a:t>
+                      </a:r>
+                    </a:p>
+                  </a:txBody>
+                  <a:tcPr>
+                    <a:solidFill>
+                      <a:srgbClr val="FFFFFF"/>
+                    </a:solidFill>
+                  </a:tcPr>
+                </a:tc>
+                <a:tc>
+                  <a:txBody>
+                    <a:bodyPr/>
+                    <a:lstStyle/>
+                    <a:p>
+                      <a:r>
+                        <a:rPr sz="1000"/>
+                        <a:t>-42</a:t>
+                      </a:r>
+                    </a:p>
+                  </a:txBody>
+                  <a:tcPr>
+                    <a:solidFill>
+                      <a:srgbClr val="FFFFFF"/>
+                    </a:solidFill>
+                  </a:tcPr>
+                </a:tc>
+                <a:tc>
+                  <a:txBody>
+                    <a:bodyPr/>
+                    <a:lstStyle/>
+                    <a:p>
+                      <a:r>
+                        <a:rPr sz="1000"/>
+                        <a:t>100%</a:t>
+                      </a:r>
+                    </a:p>
+                  </a:txBody>
+                  <a:tcPr>
+                    <a:solidFill>
+                      <a:srgbClr val="FFFFFF"/>
+                    </a:solidFill>
+                  </a:tcPr>
+                </a:tc>
+              </a:tr>
+              <a:tr h="269507">
+                <a:tc>
+                  <a:txBody>
+                    <a:bodyPr/>
+                    <a:lstStyle/>
+                    <a:p>
+                      <a:r>
+                        <a:rPr sz="1000" b="1">
+                          <a:solidFill>
+                            <a:srgbClr val="1E8A3C"/>
+                          </a:solidFill>
+                        </a:rPr>
+                        <a:t>3</a:t>
+                      </a:r>
+                    </a:p>
+                  </a:txBody>
+                  <a:tcPr>
+                    <a:solidFill>
+                      <a:srgbClr val="F2F4F8"/>
+                    </a:solidFill>
+                  </a:tcPr>
+                </a:tc>
+                <a:tc>
+                  <a:txBody>
+                    <a:bodyPr/>
+                    <a:lstStyle/>
+                    <a:p>
+                      <a:r>
+                        <a:rPr sz="1000"/>
+                        <a:t>Класс ПК</a:t>
+                      </a:r>
+                    </a:p>
+                  </a:txBody>
+                  <a:tcPr>
+                    <a:solidFill>
+                      <a:srgbClr val="F2F4F8"/>
+                    </a:solidFill>
+                  </a:tcPr>
+                </a:tc>
+                <a:tc>
+                  <a:txBody>
+                    <a:bodyPr/>
+                    <a:lstStyle/>
+                    <a:p>
+                      <a:r>
+                        <a:rPr sz="1000"/>
+                        <a:t>87</a:t>
+                      </a:r>
+                    </a:p>
+                  </a:txBody>
+                  <a:tcPr>
+                    <a:solidFill>
+                      <a:srgbClr val="F2F4F8"/>
+                    </a:solidFill>
+                  </a:tcPr>
+                </a:tc>
+                <a:tc>
+                  <a:txBody>
+                    <a:bodyPr/>
+                    <a:lstStyle/>
+                    <a:p>
+                      <a:r>
+                        <a:rPr sz="1000"/>
+                        <a:t>AP-3</a:t>
+                      </a:r>
+                    </a:p>
+                  </a:txBody>
+                  <a:tcPr>
+                    <a:solidFill>
+                      <a:srgbClr val="F2F4F8"/>
+                    </a:solidFill>
+                  </a:tcPr>
+                </a:tc>
+                <a:tc>
+                  <a:txBody>
+                    <a:bodyPr/>
+                    <a:lstStyle/>
+                    <a:p>
+                      <a:r>
+                        <a:rPr sz="1000"/>
+                        <a:t>-32</a:t>
+                      </a:r>
+                    </a:p>
+                  </a:txBody>
+                  <a:tcPr>
+                    <a:solidFill>
+                      <a:srgbClr val="F2F4F8"/>
+                    </a:solidFill>
+                  </a:tcPr>
+                </a:tc>
+                <a:tc>
+                  <a:txBody>
+                    <a:bodyPr/>
+                    <a:lstStyle/>
+                    <a:p>
+                      <a:r>
+                        <a:rPr sz="1000"/>
+                        <a:t>-41</a:t>
+                      </a:r>
+                    </a:p>
+                  </a:txBody>
+                  <a:tcPr>
+                    <a:solidFill>
+                      <a:srgbClr val="F2F4F8"/>
+                    </a:solidFill>
+                  </a:tcPr>
+                </a:tc>
+                <a:tc>
+                  <a:txBody>
+                    <a:bodyPr/>
+                    <a:lstStyle/>
+                    <a:p>
+                      <a:r>
+                        <a:rPr sz="1000"/>
+                        <a:t>100%</a:t>
+                      </a:r>
+                    </a:p>
+                  </a:txBody>
+                  <a:tcPr>
+                    <a:solidFill>
+                      <a:srgbClr val="F2F4F8"/>
+                    </a:solidFill>
+                  </a:tcPr>
+                </a:tc>
+                <a:tc>
+                  <a:txBody>
+                    <a:bodyPr/>
+                    <a:lstStyle/>
+                    <a:p>
+                      <a:r>
+                        <a:rPr sz="1000"/>
+                        <a:t>-41</a:t>
+                      </a:r>
+                    </a:p>
+                  </a:txBody>
+                  <a:tcPr>
+                    <a:solidFill>
+                      <a:srgbClr val="F2F4F8"/>
+                    </a:solidFill>
+                  </a:tcPr>
+                </a:tc>
+                <a:tc>
+                  <a:txBody>
+                    <a:bodyPr/>
+                    <a:lstStyle/>
+                    <a:p>
+                      <a:r>
+                        <a:rPr sz="1000"/>
+                        <a:t>-52</a:t>
+                      </a:r>
+                    </a:p>
+                  </a:txBody>
+                  <a:tcPr>
+                    <a:solidFill>
+                      <a:srgbClr val="F2F4F8"/>
+                    </a:solidFill>
+                  </a:tcPr>
+                </a:tc>
+                <a:tc>
+                  <a:txBody>
+                    <a:bodyPr/>
+                    <a:lstStyle/>
+                    <a:p>
+                      <a:r>
+                        <a:rPr sz="1000"/>
+                        <a:t>100%</a:t>
+                      </a:r>
+                    </a:p>
+                  </a:txBody>
+                  <a:tcPr>
+                    <a:solidFill>
+                      <a:srgbClr val="F2F4F8"/>
+                    </a:solidFill>
+                  </a:tcPr>
+                </a:tc>
+              </a:tr>
+              <a:tr h="269507">
+                <a:tc>
+                  <a:txBody>
+                    <a:bodyPr/>
+                    <a:lstStyle/>
+                    <a:p>
+                      <a:r>
+                        <a:rPr sz="1000" b="1">
+                          <a:solidFill>
+                            <a:srgbClr val="1E8A3C"/>
+                          </a:solidFill>
+                        </a:rPr>
+                        <a:t>4</a:t>
+                      </a:r>
+                    </a:p>
+                  </a:txBody>
+                  <a:tcPr>
+                    <a:solidFill>
+                      <a:srgbClr val="FFFFFF"/>
+                    </a:solidFill>
+                  </a:tcPr>
+                </a:tc>
+                <a:tc>
+                  <a:txBody>
+                    <a:bodyPr/>
+                    <a:lstStyle/>
+                    <a:p>
+                      <a:r>
+                        <a:rPr sz="1000"/>
+                        <a:t>Класс ТЭС УЭЦН</a:t>
+                      </a:r>
+                    </a:p>
+                  </a:txBody>
+                  <a:tcPr>
+                    <a:solidFill>
+                      <a:srgbClr val="FFFFFF"/>
+                    </a:solidFill>
+                  </a:tcPr>
+                </a:tc>
+                <a:tc>
+                  <a:txBody>
+                    <a:bodyPr/>
+                    <a:lstStyle/>
+                    <a:p>
+                      <a:r>
+                        <a:rPr sz="1000"/>
+                        <a:t>52</a:t>
+                      </a:r>
+                    </a:p>
+                  </a:txBody>
+                  <a:tcPr>
+                    <a:solidFill>
+                      <a:srgbClr val="FFFFFF"/>
+                    </a:solidFill>
+                  </a:tcPr>
+                </a:tc>
+                <a:tc>
+                  <a:txBody>
+                    <a:bodyPr/>
+                    <a:lstStyle/>
+                    <a:p>
+                      <a:r>
+                        <a:rPr sz="1000"/>
+                        <a:t>AP-4</a:t>
+                      </a:r>
+                    </a:p>
+                  </a:txBody>
+                  <a:tcPr>
+                    <a:solidFill>
+                      <a:srgbClr val="FFFFFF"/>
+                    </a:solidFill>
+                  </a:tcPr>
+                </a:tc>
+                <a:tc>
+                  <a:txBody>
+                    <a:bodyPr/>
+                    <a:lstStyle/>
+                    <a:p>
+                      <a:r>
+                        <a:rPr sz="1000"/>
+                        <a:t>-30</a:t>
+                      </a:r>
+                    </a:p>
+                  </a:txBody>
+                  <a:tcPr>
+                    <a:solidFill>
+                      <a:srgbClr val="FFFFFF"/>
+                    </a:solidFill>
+                  </a:tcPr>
+                </a:tc>
+                <a:tc>
+                  <a:txBody>
+                    <a:bodyPr/>
+                    <a:lstStyle/>
+                    <a:p>
+                      <a:r>
+                        <a:rPr sz="1000"/>
+                        <a:t>-40</a:t>
+                      </a:r>
+                    </a:p>
+                  </a:txBody>
+                  <a:tcPr>
+                    <a:solidFill>
+                      <a:srgbClr val="FFFFFF"/>
+                    </a:solidFill>
+                  </a:tcPr>
+                </a:tc>
+                <a:tc>
+                  <a:txBody>
+                    <a:bodyPr/>
+                    <a:lstStyle/>
+                    <a:p>
+                      <a:r>
+                        <a:rPr sz="1000"/>
+                        <a:t>100%</a:t>
+                      </a:r>
+                    </a:p>
+                  </a:txBody>
+                  <a:tcPr>
+                    <a:solidFill>
+                      <a:srgbClr val="FFFFFF"/>
+                    </a:solidFill>
+                  </a:tcPr>
+                </a:tc>
+                <a:tc>
+                  <a:txBody>
+                    <a:bodyPr/>
+                    <a:lstStyle/>
+                    <a:p>
+                      <a:r>
+                        <a:rPr sz="1000"/>
+                        <a:t>-39</a:t>
+                      </a:r>
+                    </a:p>
+                  </a:txBody>
+                  <a:tcPr>
+                    <a:solidFill>
+                      <a:srgbClr val="FFFFFF"/>
+                    </a:solidFill>
+                  </a:tcPr>
+                </a:tc>
+                <a:tc>
+                  <a:txBody>
+                    <a:bodyPr/>
+                    <a:lstStyle/>
+                    <a:p>
+                      <a:r>
+                        <a:rPr sz="1000"/>
+                        <a:t>-51</a:t>
+                      </a:r>
+                    </a:p>
+                  </a:txBody>
+                  <a:tcPr>
+                    <a:solidFill>
+                      <a:srgbClr val="FFFFFF"/>
+                    </a:solidFill>
+                  </a:tcPr>
+                </a:tc>
+                <a:tc>
+                  <a:txBody>
+                    <a:bodyPr/>
+                    <a:lstStyle/>
+                    <a:p>
+                      <a:r>
+                        <a:rPr sz="1000"/>
+                        <a:t>100%</a:t>
+                      </a:r>
+                    </a:p>
+                  </a:txBody>
+                  <a:tcPr>
+                    <a:solidFill>
+                      <a:srgbClr val="FFFFFF"/>
+                    </a:solidFill>
+                  </a:tcPr>
+                </a:tc>
+              </a:tr>
+              <a:tr h="269507">
+                <a:tc>
+                  <a:txBody>
+                    <a:bodyPr/>
+                    <a:lstStyle/>
+                    <a:p>
+                      <a:r>
+                        <a:rPr sz="1000" b="1">
+                          <a:solidFill>
+                            <a:srgbClr val="1E8A3C"/>
+                          </a:solidFill>
+                        </a:rPr>
+                        <a:t>5</a:t>
+                      </a:r>
+                    </a:p>
+                  </a:txBody>
+                  <a:tcPr>
+                    <a:solidFill>
+                      <a:srgbClr val="F2F4F8"/>
+                    </a:solidFill>
+                  </a:tcPr>
+                </a:tc>
+                <a:tc>
+                  <a:txBody>
+                    <a:bodyPr/>
+                    <a:lstStyle/>
+                    <a:p>
+                      <a:r>
+                        <a:rPr sz="1000"/>
+                        <a:t>Класс корп. обучения №3</a:t>
+                      </a:r>
+                    </a:p>
+                  </a:txBody>
+                  <a:tcPr>
+                    <a:solidFill>
+                      <a:srgbClr val="F2F4F8"/>
+                    </a:solidFill>
+                  </a:tcPr>
+                </a:tc>
+                <a:tc>
+                  <a:txBody>
+                    <a:bodyPr/>
+                    <a:lstStyle/>
+                    <a:p>
+                      <a:r>
+                        <a:rPr sz="1000"/>
+                        <a:t>54</a:t>
+                      </a:r>
+                    </a:p>
+                  </a:txBody>
+                  <a:tcPr>
+                    <a:solidFill>
+                      <a:srgbClr val="F2F4F8"/>
+                    </a:solidFill>
+                  </a:tcPr>
+                </a:tc>
+                <a:tc>
+                  <a:txBody>
+                    <a:bodyPr/>
+                    <a:lstStyle/>
+                    <a:p>
+                      <a:r>
+                        <a:rPr sz="1000"/>
+                        <a:t>AP-5</a:t>
+                      </a:r>
+                    </a:p>
+                  </a:txBody>
+                  <a:tcPr>
+                    <a:solidFill>
+                      <a:srgbClr val="F2F4F8"/>
+                    </a:solidFill>
+                  </a:tcPr>
+                </a:tc>
+                <a:tc>
+                  <a:txBody>
+                    <a:bodyPr/>
+                    <a:lstStyle/>
+                    <a:p>
+                      <a:r>
+                        <a:rPr sz="1000"/>
+                        <a:t>-30</a:t>
+                      </a:r>
+                    </a:p>
+                  </a:txBody>
+                  <a:tcPr>
+                    <a:solidFill>
+                      <a:srgbClr val="F2F4F8"/>
+                    </a:solidFill>
+                  </a:tcPr>
+                </a:tc>
+                <a:tc>
+                  <a:txBody>
+                    <a:bodyPr/>
+                    <a:lstStyle/>
+                    <a:p>
+                      <a:r>
+                        <a:rPr sz="1000"/>
+                        <a:t>-40</a:t>
+                      </a:r>
+                    </a:p>
+                  </a:txBody>
+                  <a:tcPr>
+                    <a:solidFill>
+                      <a:srgbClr val="F2F4F8"/>
+                    </a:solidFill>
+                  </a:tcPr>
+                </a:tc>
+                <a:tc>
+                  <a:txBody>
+                    <a:bodyPr/>
+                    <a:lstStyle/>
+                    <a:p>
+                      <a:r>
+                        <a:rPr sz="1000"/>
+                        <a:t>100%</a:t>
+                      </a:r>
+                    </a:p>
+                  </a:txBody>
+                  <a:tcPr>
+                    <a:solidFill>
+                      <a:srgbClr val="F2F4F8"/>
+                    </a:solidFill>
+                  </a:tcPr>
+                </a:tc>
+                <a:tc>
+                  <a:txBody>
+                    <a:bodyPr/>
+                    <a:lstStyle/>
+                    <a:p>
+                      <a:r>
+                        <a:rPr sz="1000"/>
+                        <a:t>-39</a:t>
+                      </a:r>
+                    </a:p>
+                  </a:txBody>
+                  <a:tcPr>
+                    <a:solidFill>
+                      <a:srgbClr val="F2F4F8"/>
+                    </a:solidFill>
+                  </a:tcPr>
+                </a:tc>
+                <a:tc>
+                  <a:txBody>
+                    <a:bodyPr/>
+                    <a:lstStyle/>
+                    <a:p>
+                      <a:r>
+                        <a:rPr sz="1000"/>
+                        <a:t>-50</a:t>
+                      </a:r>
+                    </a:p>
+                  </a:txBody>
+                  <a:tcPr>
+                    <a:solidFill>
+                      <a:srgbClr val="F2F4F8"/>
+                    </a:solidFill>
+                  </a:tcPr>
+                </a:tc>
+                <a:tc>
+                  <a:txBody>
+                    <a:bodyPr/>
+                    <a:lstStyle/>
+                    <a:p>
+                      <a:r>
+                        <a:rPr sz="1000"/>
+                        <a:t>100%</a:t>
+                      </a:r>
+                    </a:p>
+                  </a:txBody>
+                  <a:tcPr>
+                    <a:solidFill>
+                      <a:srgbClr val="F2F4F8"/>
+                    </a:solidFill>
+                  </a:tcPr>
+                </a:tc>
+              </a:tr>
+              <a:tr h="269507">
+                <a:tc>
+                  <a:txBody>
+                    <a:bodyPr/>
+                    <a:lstStyle/>
+                    <a:p>
+                      <a:r>
+                        <a:rPr sz="1000" b="1">
+                          <a:solidFill>
+                            <a:srgbClr val="1E8A3C"/>
+                          </a:solidFill>
+                        </a:rPr>
+                        <a:t>6</a:t>
+                      </a:r>
+                    </a:p>
+                  </a:txBody>
+                  <a:tcPr>
+                    <a:solidFill>
+                      <a:srgbClr val="FFFFFF"/>
+                    </a:solidFill>
+                  </a:tcPr>
+                </a:tc>
+                <a:tc>
+                  <a:txBody>
+                    <a:bodyPr/>
+                    <a:lstStyle/>
+                    <a:p>
+                      <a:r>
+                        <a:rPr sz="1000"/>
+                        <a:t>Гардероб</a:t>
+                      </a:r>
+                    </a:p>
+                  </a:txBody>
+                  <a:tcPr>
+                    <a:solidFill>
+                      <a:srgbClr val="FFFFFF"/>
+                    </a:solidFill>
+                  </a:tcPr>
+                </a:tc>
+                <a:tc>
+                  <a:txBody>
+                    <a:bodyPr/>
+                    <a:lstStyle/>
+                    <a:p>
+                      <a:r>
+                        <a:rPr sz="1000"/>
+                        <a:t>48</a:t>
+                      </a:r>
+                    </a:p>
+                  </a:txBody>
+                  <a:tcPr>
+                    <a:solidFill>
+                      <a:srgbClr val="FFFFFF"/>
+                    </a:solidFill>
+                  </a:tcPr>
+                </a:tc>
+                <a:tc>
+                  <a:txBody>
+                    <a:bodyPr/>
+                    <a:lstStyle/>
+                    <a:p>
+                      <a:r>
+                        <a:rPr sz="1000"/>
+                        <a:t>AP-6</a:t>
+                      </a:r>
+                    </a:p>
+                  </a:txBody>
+                  <a:tcPr>
+                    <a:solidFill>
+                      <a:srgbClr val="FFFFFF"/>
+                    </a:solidFill>
+                  </a:tcPr>
+                </a:tc>
+                <a:tc>
+                  <a:txBody>
+                    <a:bodyPr/>
+                    <a:lstStyle/>
+                    <a:p>
+                      <a:r>
+                        <a:rPr sz="1000"/>
+                        <a:t>-30</a:t>
+                      </a:r>
+                    </a:p>
+                  </a:txBody>
+                  <a:tcPr>
+                    <a:solidFill>
+                      <a:srgbClr val="FFFFFF"/>
+                    </a:solidFill>
+                  </a:tcPr>
+                </a:tc>
+                <a:tc>
+                  <a:txBody>
+                    <a:bodyPr/>
+                    <a:lstStyle/>
+                    <a:p>
+                      <a:r>
+                        <a:rPr sz="1000"/>
+                        <a:t>-39</a:t>
+                      </a:r>
+                    </a:p>
+                  </a:txBody>
+                  <a:tcPr>
+                    <a:solidFill>
+                      <a:srgbClr val="FFFFFF"/>
+                    </a:solidFill>
+                  </a:tcPr>
+                </a:tc>
+                <a:tc>
+                  <a:txBody>
+                    <a:bodyPr/>
+                    <a:lstStyle/>
+                    <a:p>
+                      <a:r>
+                        <a:rPr sz="1000"/>
+                        <a:t>100%</a:t>
+                      </a:r>
+                    </a:p>
+                  </a:txBody>
+                  <a:tcPr>
+                    <a:solidFill>
+                      <a:srgbClr val="FFFFFF"/>
+                    </a:solidFill>
+                  </a:tcPr>
+                </a:tc>
+                <a:tc>
+                  <a:txBody>
+                    <a:bodyPr/>
+                    <a:lstStyle/>
+                    <a:p>
+                      <a:r>
+                        <a:rPr sz="1000"/>
+                        <a:t>-39</a:t>
+                      </a:r>
+                    </a:p>
+                  </a:txBody>
+                  <a:tcPr>
+                    <a:solidFill>
+                      <a:srgbClr val="FFFFFF"/>
+                    </a:solidFill>
+                  </a:tcPr>
+                </a:tc>
+                <a:tc>
+                  <a:txBody>
+                    <a:bodyPr/>
+                    <a:lstStyle/>
+                    <a:p>
+                      <a:r>
+                        <a:rPr sz="1000"/>
+                        <a:t>-50</a:t>
+                      </a:r>
+                    </a:p>
+                  </a:txBody>
+                  <a:tcPr>
+                    <a:solidFill>
+                      <a:srgbClr val="FFFFFF"/>
+                    </a:solidFill>
+                  </a:tcPr>
+                </a:tc>
+                <a:tc>
+                  <a:txBody>
+                    <a:bodyPr/>
+                    <a:lstStyle/>
+                    <a:p>
+                      <a:r>
+                        <a:rPr sz="1000"/>
+                        <a:t>100%</a:t>
+                      </a:r>
+                    </a:p>
+                  </a:txBody>
+                  <a:tcPr>
+                    <a:solidFill>
+                      <a:srgbClr val="FFFFFF"/>
+                    </a:solidFill>
+                  </a:tcPr>
+                </a:tc>
+              </a:tr>
+              <a:tr h="269507">
+                <a:tc>
+                  <a:txBody>
+                    <a:bodyPr/>
+                    <a:lstStyle/>
+                    <a:p>
+                      <a:r>
+                        <a:rPr sz="1000" b="1">
+                          <a:solidFill>
+                            <a:srgbClr val="C87A00"/>
+                          </a:solidFill>
+                        </a:rPr>
+                        <a:t>7</a:t>
+                      </a:r>
+                    </a:p>
+                  </a:txBody>
+                  <a:tcPr>
+                    <a:solidFill>
+                      <a:srgbClr val="F2F4F8"/>
+                    </a:solidFill>
+                  </a:tcPr>
+                </a:tc>
+                <a:tc>
+                  <a:txBody>
+                    <a:bodyPr/>
+                    <a:lstStyle/>
+                    <a:p>
+                      <a:r>
+                        <a:rPr sz="1000"/>
+                        <a:t>Санузел мужской</a:t>
+                      </a:r>
+                    </a:p>
+                  </a:txBody>
+                  <a:tcPr>
+                    <a:solidFill>
+                      <a:srgbClr val="F2F4F8"/>
+                    </a:solidFill>
+                  </a:tcPr>
+                </a:tc>
+                <a:tc>
+                  <a:txBody>
+                    <a:bodyPr/>
+                    <a:lstStyle/>
+                    <a:p>
+                      <a:r>
+                        <a:rPr sz="1000"/>
+                        <a:t>21</a:t>
+                      </a:r>
+                    </a:p>
+                  </a:txBody>
+                  <a:tcPr>
+                    <a:solidFill>
+                      <a:srgbClr val="F2F4F8"/>
+                    </a:solidFill>
+                  </a:tcPr>
+                </a:tc>
+                <a:tc>
+                  <a:txBody>
+                    <a:bodyPr/>
+                    <a:lstStyle/>
+                    <a:p>
+                      <a:r>
+                        <a:rPr sz="1000"/>
+                        <a:t>AP-12w</a:t>
+                      </a:r>
+                    </a:p>
+                  </a:txBody>
+                  <a:tcPr>
+                    <a:solidFill>
+                      <a:srgbClr val="F2F4F8"/>
+                    </a:solidFill>
+                  </a:tcPr>
+                </a:tc>
+                <a:tc>
+                  <a:txBody>
+                    <a:bodyPr/>
+                    <a:lstStyle/>
+                    <a:p>
+                      <a:r>
+                        <a:rPr sz="1000"/>
+                        <a:t>-67</a:t>
+                      </a:r>
+                    </a:p>
+                  </a:txBody>
+                  <a:tcPr>
+                    <a:solidFill>
+                      <a:srgbClr val="F2F4F8"/>
+                    </a:solidFill>
+                  </a:tcPr>
+                </a:tc>
+                <a:tc>
+                  <a:txBody>
+                    <a:bodyPr/>
+                    <a:lstStyle/>
+                    <a:p>
+                      <a:r>
+                        <a:rPr sz="1000"/>
+                        <a:t>-82</a:t>
+                      </a:r>
+                    </a:p>
+                  </a:txBody>
+                  <a:tcPr>
+                    <a:solidFill>
+                      <a:srgbClr val="F2F4F8"/>
+                    </a:solidFill>
+                  </a:tcPr>
+                </a:tc>
+                <a:tc>
+                  <a:txBody>
+                    <a:bodyPr/>
+                    <a:lstStyle/>
+                    <a:p>
+                      <a:r>
+                        <a:rPr sz="1000">
+                          <a:solidFill>
+                            <a:srgbClr val="C87A00"/>
+                          </a:solidFill>
+                        </a:rPr>
+                        <a:t>74%</a:t>
+                      </a:r>
+                    </a:p>
+                  </a:txBody>
+                  <a:tcPr>
+                    <a:solidFill>
+                      <a:srgbClr val="F2F4F8"/>
+                    </a:solidFill>
+                  </a:tcPr>
+                </a:tc>
+                <a:tc>
+                  <a:txBody>
+                    <a:bodyPr/>
+                    <a:lstStyle/>
+                    <a:p>
+                      <a:r>
+                        <a:rPr sz="1000"/>
+                        <a:t>-94</a:t>
+                      </a:r>
+                    </a:p>
+                  </a:txBody>
+                  <a:tcPr>
+                    <a:solidFill>
+                      <a:srgbClr val="F2F4F8"/>
+                    </a:solidFill>
+                  </a:tcPr>
+                </a:tc>
+                <a:tc>
+                  <a:txBody>
+                    <a:bodyPr/>
+                    <a:lstStyle/>
+                    <a:p>
+                      <a:r>
+                        <a:rPr sz="1000"/>
+                        <a:t>-118</a:t>
+                      </a:r>
+                    </a:p>
+                  </a:txBody>
+                  <a:tcPr>
+                    <a:solidFill>
+                      <a:srgbClr val="F2F4F8"/>
+                    </a:solidFill>
+                  </a:tcPr>
+                </a:tc>
+                <a:tc>
+                  <a:txBody>
+                    <a:bodyPr/>
+                    <a:lstStyle/>
+                    <a:p>
+                      <a:r>
+                        <a:rPr sz="1000">
+                          <a:solidFill>
+                            <a:srgbClr val="C02626"/>
+                          </a:solidFill>
+                        </a:rPr>
+                        <a:t>0%</a:t>
+                      </a:r>
+                    </a:p>
+                  </a:txBody>
+                  <a:tcPr>
+                    <a:solidFill>
+                      <a:srgbClr val="F2F4F8"/>
+                    </a:solidFill>
+                  </a:tcPr>
+                </a:tc>
+              </a:tr>
+              <a:tr h="269507">
+                <a:tc>
+                  <a:txBody>
+                    <a:bodyPr/>
+                    <a:lstStyle/>
+                    <a:p>
+                      <a:r>
+                        <a:rPr sz="1000" b="1">
+                          <a:solidFill>
+                            <a:srgbClr val="C02626"/>
+                          </a:solidFill>
+                        </a:rPr>
+                        <a:t>8</a:t>
+                      </a:r>
+                    </a:p>
+                  </a:txBody>
+                  <a:tcPr>
+                    <a:solidFill>
+                      <a:srgbClr val="FFFFFF"/>
+                    </a:solidFill>
+                  </a:tcPr>
+                </a:tc>
+                <a:tc>
+                  <a:txBody>
+                    <a:bodyPr/>
+                    <a:lstStyle/>
+                    <a:p>
+                      <a:r>
+                        <a:rPr sz="1000"/>
+                        <a:t>Санузел женский</a:t>
+                      </a:r>
+                    </a:p>
+                  </a:txBody>
+                  <a:tcPr>
+                    <a:solidFill>
+                      <a:srgbClr val="FFFFFF"/>
+                    </a:solidFill>
+                  </a:tcPr>
+                </a:tc>
+                <a:tc>
+                  <a:txBody>
+                    <a:bodyPr/>
+                    <a:lstStyle/>
+                    <a:p>
+                      <a:r>
+                        <a:rPr sz="1000"/>
+                        <a:t>15</a:t>
+                      </a:r>
+                    </a:p>
+                  </a:txBody>
+                  <a:tcPr>
+                    <a:solidFill>
+                      <a:srgbClr val="FFFFFF"/>
+                    </a:solidFill>
+                  </a:tcPr>
+                </a:tc>
+                <a:tc>
+                  <a:txBody>
+                    <a:bodyPr/>
+                    <a:lstStyle/>
+                    <a:p>
+                      <a:r>
+                        <a:rPr sz="1000"/>
+                        <a:t>AP-12w</a:t>
+                      </a:r>
+                    </a:p>
+                  </a:txBody>
+                  <a:tcPr>
+                    <a:solidFill>
+                      <a:srgbClr val="FFFFFF"/>
+                    </a:solidFill>
+                  </a:tcPr>
+                </a:tc>
+                <a:tc>
+                  <a:txBody>
+                    <a:bodyPr/>
+                    <a:lstStyle/>
+                    <a:p>
+                      <a:r>
+                        <a:rPr sz="1000"/>
+                        <a:t>-72</a:t>
+                      </a:r>
+                    </a:p>
+                  </a:txBody>
+                  <a:tcPr>
+                    <a:solidFill>
+                      <a:srgbClr val="FFFFFF"/>
+                    </a:solidFill>
+                  </a:tcPr>
+                </a:tc>
+                <a:tc>
+                  <a:txBody>
+                    <a:bodyPr/>
+                    <a:lstStyle/>
+                    <a:p>
+                      <a:r>
+                        <a:rPr sz="1000"/>
+                        <a:t>-85</a:t>
+                      </a:r>
+                    </a:p>
+                  </a:txBody>
+                  <a:tcPr>
+                    <a:solidFill>
+                      <a:srgbClr val="FFFFFF"/>
+                    </a:solidFill>
+                  </a:tcPr>
+                </a:tc>
+                <a:tc>
+                  <a:txBody>
+                    <a:bodyPr/>
+                    <a:lstStyle/>
+                    <a:p>
+                      <a:r>
+                        <a:rPr sz="1000">
+                          <a:solidFill>
+                            <a:srgbClr val="C02626"/>
+                          </a:solidFill>
+                        </a:rPr>
+                        <a:t>20%</a:t>
+                      </a:r>
+                    </a:p>
+                  </a:txBody>
+                  <a:tcPr>
+                    <a:solidFill>
+                      <a:srgbClr val="FFFFFF"/>
+                    </a:solidFill>
+                  </a:tcPr>
+                </a:tc>
+                <a:tc>
+                  <a:txBody>
+                    <a:bodyPr/>
+                    <a:lstStyle/>
+                    <a:p>
+                      <a:r>
+                        <a:rPr sz="1000"/>
+                        <a:t>-100</a:t>
+                      </a:r>
+                    </a:p>
+                  </a:txBody>
+                  <a:tcPr>
+                    <a:solidFill>
+                      <a:srgbClr val="FFFFFF"/>
+                    </a:solidFill>
+                  </a:tcPr>
+                </a:tc>
+                <a:tc>
+                  <a:txBody>
+                    <a:bodyPr/>
+                    <a:lstStyle/>
+                    <a:p>
+                      <a:r>
+                        <a:rPr sz="1000"/>
+                        <a:t>-121</a:t>
+                      </a:r>
+                    </a:p>
+                  </a:txBody>
+                  <a:tcPr>
+                    <a:solidFill>
+                      <a:srgbClr val="FFFFFF"/>
+                    </a:solidFill>
+                  </a:tcPr>
+                </a:tc>
+                <a:tc>
+                  <a:txBody>
+                    <a:bodyPr/>
+                    <a:lstStyle/>
+                    <a:p>
+                      <a:r>
+                        <a:rPr sz="1000">
+                          <a:solidFill>
+                            <a:srgbClr val="C02626"/>
+                          </a:solidFill>
+                        </a:rPr>
+                        <a:t>0%</a:t>
+                      </a:r>
+                    </a:p>
+                  </a:txBody>
+                  <a:tcPr>
+                    <a:solidFill>
+                      <a:srgbClr val="FFFFFF"/>
+                    </a:solidFill>
+                  </a:tcPr>
+                </a:tc>
+              </a:tr>
+              <a:tr h="269507">
+                <a:tc>
+                  <a:txBody>
+                    <a:bodyPr/>
+                    <a:lstStyle/>
+                    <a:p>
+                      <a:r>
+                        <a:rPr sz="1000" b="1">
+                          <a:solidFill>
+                            <a:srgbClr val="C02626"/>
+                          </a:solidFill>
+                        </a:rPr>
+                        <a:t>9</a:t>
+                      </a:r>
+                    </a:p>
+                  </a:txBody>
+                  <a:tcPr>
+                    <a:solidFill>
+                      <a:srgbClr val="F2F4F8"/>
+                    </a:solidFill>
+                  </a:tcPr>
+                </a:tc>
+                <a:tc>
+                  <a:txBody>
+                    <a:bodyPr/>
+                    <a:lstStyle/>
+                    <a:p>
+                      <a:r>
+                        <a:rPr sz="1000"/>
+                        <a:t>Тех. помещение</a:t>
+                      </a:r>
+                    </a:p>
+                  </a:txBody>
+                  <a:tcPr>
+                    <a:solidFill>
+                      <a:srgbClr val="F2F4F8"/>
+                    </a:solidFill>
+                  </a:tcPr>
+                </a:tc>
+                <a:tc>
+                  <a:txBody>
+                    <a:bodyPr/>
+                    <a:lstStyle/>
+                    <a:p>
+                      <a:r>
+                        <a:rPr sz="1000"/>
+                        <a:t>5</a:t>
+                      </a:r>
+                    </a:p>
+                  </a:txBody>
+                  <a:tcPr>
+                    <a:solidFill>
+                      <a:srgbClr val="F2F4F8"/>
+                    </a:solidFill>
+                  </a:tcPr>
+                </a:tc>
+                <a:tc>
+                  <a:txBody>
+                    <a:bodyPr/>
+                    <a:lstStyle/>
+                    <a:p>
+                      <a:r>
+                        <a:rPr sz="1000"/>
+                        <a:t>AP-12w</a:t>
+                      </a:r>
+                    </a:p>
+                  </a:txBody>
+                  <a:tcPr>
+                    <a:solidFill>
+                      <a:srgbClr val="F2F4F8"/>
+                    </a:solidFill>
+                  </a:tcPr>
+                </a:tc>
+                <a:tc>
+                  <a:txBody>
+                    <a:bodyPr/>
+                    <a:lstStyle/>
+                    <a:p>
+                      <a:r>
+                        <a:rPr sz="1000"/>
+                        <a:t>-86</a:t>
+                      </a:r>
+                    </a:p>
+                  </a:txBody>
+                  <a:tcPr>
+                    <a:solidFill>
+                      <a:srgbClr val="F2F4F8"/>
+                    </a:solidFill>
+                  </a:tcPr>
+                </a:tc>
+                <a:tc>
+                  <a:txBody>
+                    <a:bodyPr/>
+                    <a:lstStyle/>
+                    <a:p>
+                      <a:r>
+                        <a:rPr sz="1000"/>
+                        <a:t>-90</a:t>
+                      </a:r>
+                    </a:p>
+                  </a:txBody>
+                  <a:tcPr>
+                    <a:solidFill>
+                      <a:srgbClr val="F2F4F8"/>
+                    </a:solidFill>
+                  </a:tcPr>
+                </a:tc>
+                <a:tc>
+                  <a:txBody>
+                    <a:bodyPr/>
+                    <a:lstStyle/>
+                    <a:p>
+                      <a:r>
+                        <a:rPr sz="1000">
+                          <a:solidFill>
+                            <a:srgbClr val="C02626"/>
+                          </a:solidFill>
+                        </a:rPr>
+                        <a:t>0%</a:t>
+                      </a:r>
+                    </a:p>
+                  </a:txBody>
+                  <a:tcPr>
+                    <a:solidFill>
+                      <a:srgbClr val="F2F4F8"/>
+                    </a:solidFill>
+                  </a:tcPr>
+                </a:tc>
+                <a:tc>
+                  <a:txBody>
+                    <a:bodyPr/>
+                    <a:lstStyle/>
+                    <a:p>
+                      <a:r>
+                        <a:rPr sz="1000"/>
+                        <a:t>-123</a:t>
+                      </a:r>
+                    </a:p>
+                  </a:txBody>
+                  <a:tcPr>
+                    <a:solidFill>
+                      <a:srgbClr val="F2F4F8"/>
+                    </a:solidFill>
+                  </a:tcPr>
+                </a:tc>
+                <a:tc>
+                  <a:txBody>
+                    <a:bodyPr/>
+                    <a:lstStyle/>
+                    <a:p>
+                      <a:r>
+                        <a:rPr sz="1000"/>
+                        <a:t>-127</a:t>
+                      </a:r>
+                    </a:p>
+                  </a:txBody>
+                  <a:tcPr>
+                    <a:solidFill>
+                      <a:srgbClr val="F2F4F8"/>
+                    </a:solidFill>
+                  </a:tcPr>
+                </a:tc>
+                <a:tc>
+                  <a:txBody>
+                    <a:bodyPr/>
+                    <a:lstStyle/>
+                    <a:p>
+                      <a:r>
+                        <a:rPr sz="1000">
+                          <a:solidFill>
+                            <a:srgbClr val="C02626"/>
+                          </a:solidFill>
+                        </a:rPr>
+                        <a:t>0%</a:t>
+                      </a:r>
+                    </a:p>
+                  </a:txBody>
+                  <a:tcPr>
+                    <a:solidFill>
+                      <a:srgbClr val="F2F4F8"/>
+                    </a:solidFill>
+                  </a:tcPr>
+                </a:tc>
+              </a:tr>
+              <a:tr h="269507">
+                <a:tc>
+                  <a:txBody>
+                    <a:bodyPr/>
+                    <a:lstStyle/>
+                    <a:p>
+                      <a:r>
+                        <a:rPr sz="1000" b="1">
+                          <a:solidFill>
+                            <a:srgbClr val="1E8A3C"/>
+                          </a:solidFill>
+                        </a:rPr>
+                        <a:t>10</a:t>
+                      </a:r>
+                    </a:p>
+                  </a:txBody>
+                  <a:tcPr>
+                    <a:solidFill>
+                      <a:srgbClr val="FFFFFF"/>
+                    </a:solidFill>
+                  </a:tcPr>
+                </a:tc>
+                <a:tc>
+                  <a:txBody>
+                    <a:bodyPr/>
+                    <a:lstStyle/>
+                    <a:p>
+                      <a:r>
+                        <a:rPr sz="1000"/>
+                        <a:t>Склад хранения СИЗ РВ</a:t>
+                      </a:r>
+                    </a:p>
+                  </a:txBody>
+                  <a:tcPr>
+                    <a:solidFill>
+                      <a:srgbClr val="FFFFFF"/>
+                    </a:solidFill>
+                  </a:tcPr>
+                </a:tc>
+                <a:tc>
+                  <a:txBody>
+                    <a:bodyPr/>
+                    <a:lstStyle/>
+                    <a:p>
+                      <a:r>
+                        <a:rPr sz="1000"/>
+                        <a:t>13</a:t>
+                      </a:r>
+                    </a:p>
+                  </a:txBody>
+                  <a:tcPr>
+                    <a:solidFill>
+                      <a:srgbClr val="FFFFFF"/>
+                    </a:solidFill>
+                  </a:tcPr>
+                </a:tc>
+                <a:tc>
+                  <a:txBody>
+                    <a:bodyPr/>
+                    <a:lstStyle/>
+                    <a:p>
+                      <a:r>
+                        <a:rPr sz="1000"/>
+                        <a:t>AP-12w</a:t>
+                      </a:r>
+                    </a:p>
+                  </a:txBody>
+                  <a:tcPr>
+                    <a:solidFill>
+                      <a:srgbClr val="FFFFFF"/>
+                    </a:solidFill>
+                  </a:tcPr>
+                </a:tc>
+                <a:tc>
+                  <a:txBody>
+                    <a:bodyPr/>
+                    <a:lstStyle/>
+                    <a:p>
+                      <a:r>
+                        <a:rPr sz="1000"/>
+                        <a:t>-55</a:t>
+                      </a:r>
+                    </a:p>
+                  </a:txBody>
+                  <a:tcPr>
+                    <a:solidFill>
+                      <a:srgbClr val="FFFFFF"/>
+                    </a:solidFill>
+                  </a:tcPr>
+                </a:tc>
+                <a:tc>
+                  <a:txBody>
+                    <a:bodyPr/>
+                    <a:lstStyle/>
+                    <a:p>
+                      <a:r>
+                        <a:rPr sz="1000"/>
+                        <a:t>-68</a:t>
+                      </a:r>
+                    </a:p>
+                  </a:txBody>
+                  <a:tcPr>
+                    <a:solidFill>
+                      <a:srgbClr val="FFFFFF"/>
+                    </a:solidFill>
+                  </a:tcPr>
+                </a:tc>
+                <a:tc>
+                  <a:txBody>
+                    <a:bodyPr/>
+                    <a:lstStyle/>
+                    <a:p>
+                      <a:r>
+                        <a:rPr sz="1000"/>
+                        <a:t>100%</a:t>
+                      </a:r>
+                    </a:p>
+                  </a:txBody>
+                  <a:tcPr>
+                    <a:solidFill>
+                      <a:srgbClr val="FFFFFF"/>
+                    </a:solidFill>
+                  </a:tcPr>
+                </a:tc>
+                <a:tc>
+                  <a:txBody>
+                    <a:bodyPr/>
+                    <a:lstStyle/>
+                    <a:p>
+                      <a:r>
+                        <a:rPr sz="1000"/>
+                        <a:t>-74</a:t>
+                      </a:r>
+                    </a:p>
+                  </a:txBody>
+                  <a:tcPr>
+                    <a:solidFill>
+                      <a:srgbClr val="FFFFFF"/>
+                    </a:solidFill>
+                  </a:tcPr>
+                </a:tc>
+                <a:tc>
+                  <a:txBody>
+                    <a:bodyPr/>
+                    <a:lstStyle/>
+                    <a:p>
+                      <a:r>
+                        <a:rPr sz="1000"/>
+                        <a:t>-95</a:t>
+                      </a:r>
+                    </a:p>
+                  </a:txBody>
+                  <a:tcPr>
+                    <a:solidFill>
+                      <a:srgbClr val="FFFFFF"/>
+                    </a:solidFill>
+                  </a:tcPr>
+                </a:tc>
+                <a:tc>
+                  <a:txBody>
+                    <a:bodyPr/>
+                    <a:lstStyle/>
+                    <a:p>
+                      <a:r>
+                        <a:rPr sz="1000">
+                          <a:solidFill>
+                            <a:srgbClr val="C02626"/>
+                          </a:solidFill>
+                        </a:rPr>
+                        <a:t>13%</a:t>
+                      </a:r>
+                    </a:p>
+                  </a:txBody>
+                  <a:tcPr>
+                    <a:solidFill>
+                      <a:srgbClr val="FFFFFF"/>
+                    </a:solidFill>
+                  </a:tcPr>
+                </a:tc>
+              </a:tr>
+              <a:tr h="269507">
+                <a:tc>
+                  <a:txBody>
+                    <a:bodyPr/>
+                    <a:lstStyle/>
+                    <a:p>
+                      <a:r>
+                        <a:rPr sz="1000" b="1">
+                          <a:solidFill>
+                            <a:srgbClr val="1E8A3C"/>
+                          </a:solidFill>
+                        </a:rPr>
+                        <a:t>11</a:t>
+                      </a:r>
+                    </a:p>
+                  </a:txBody>
+                  <a:tcPr>
+                    <a:solidFill>
+                      <a:srgbClr val="F2F4F8"/>
+                    </a:solidFill>
+                  </a:tcPr>
+                </a:tc>
+                <a:tc>
+                  <a:txBody>
+                    <a:bodyPr/>
+                    <a:lstStyle/>
+                    <a:p>
+                      <a:r>
+                        <a:rPr sz="1000"/>
+                        <a:t>Раздевалка спецодежды</a:t>
+                      </a:r>
+                    </a:p>
+                  </a:txBody>
+                  <a:tcPr>
+                    <a:solidFill>
+                      <a:srgbClr val="F2F4F8"/>
+                    </a:solidFill>
+                  </a:tcPr>
+                </a:tc>
+                <a:tc>
+                  <a:txBody>
+                    <a:bodyPr/>
+                    <a:lstStyle/>
+                    <a:p>
+                      <a:r>
+                        <a:rPr sz="1000"/>
+                        <a:t>13</a:t>
+                      </a:r>
+                    </a:p>
+                  </a:txBody>
+                  <a:tcPr>
+                    <a:solidFill>
+                      <a:srgbClr val="F2F4F8"/>
+                    </a:solidFill>
+                  </a:tcPr>
+                </a:tc>
+                <a:tc>
+                  <a:txBody>
+                    <a:bodyPr/>
+                    <a:lstStyle/>
+                    <a:p>
+                      <a:r>
+                        <a:rPr sz="1000"/>
+                        <a:t>AP-12w</a:t>
+                      </a:r>
+                    </a:p>
+                  </a:txBody>
+                  <a:tcPr>
+                    <a:solidFill>
+                      <a:srgbClr val="F2F4F8"/>
+                    </a:solidFill>
+                  </a:tcPr>
+                </a:tc>
+                <a:tc>
+                  <a:txBody>
+                    <a:bodyPr/>
+                    <a:lstStyle/>
+                    <a:p>
+                      <a:r>
+                        <a:rPr sz="1000"/>
+                        <a:t>-48</a:t>
+                      </a:r>
+                    </a:p>
+                  </a:txBody>
+                  <a:tcPr>
+                    <a:solidFill>
+                      <a:srgbClr val="F2F4F8"/>
+                    </a:solidFill>
+                  </a:tcPr>
+                </a:tc>
+                <a:tc>
+                  <a:txBody>
+                    <a:bodyPr/>
+                    <a:lstStyle/>
+                    <a:p>
+                      <a:r>
+                        <a:rPr sz="1000"/>
+                        <a:t>-51</a:t>
+                      </a:r>
+                    </a:p>
+                  </a:txBody>
+                  <a:tcPr>
+                    <a:solidFill>
+                      <a:srgbClr val="F2F4F8"/>
+                    </a:solidFill>
+                  </a:tcPr>
+                </a:tc>
+                <a:tc>
+                  <a:txBody>
+                    <a:bodyPr/>
+                    <a:lstStyle/>
+                    <a:p>
+                      <a:r>
+                        <a:rPr sz="1000"/>
+                        <a:t>100%</a:t>
+                      </a:r>
+                    </a:p>
+                  </a:txBody>
+                  <a:tcPr>
+                    <a:solidFill>
+                      <a:srgbClr val="F2F4F8"/>
+                    </a:solidFill>
+                  </a:tcPr>
+                </a:tc>
+                <a:tc>
+                  <a:txBody>
+                    <a:bodyPr/>
+                    <a:lstStyle/>
+                    <a:p>
+                      <a:r>
+                        <a:rPr sz="1000"/>
+                        <a:t>-66</a:t>
+                      </a:r>
+                    </a:p>
+                  </a:txBody>
+                  <a:tcPr>
+                    <a:solidFill>
+                      <a:srgbClr val="F2F4F8"/>
+                    </a:solidFill>
+                  </a:tcPr>
+                </a:tc>
+                <a:tc>
+                  <a:txBody>
+                    <a:bodyPr/>
+                    <a:lstStyle/>
+                    <a:p>
+                      <a:r>
+                        <a:rPr sz="1000"/>
+                        <a:t>-70</a:t>
+                      </a:r>
+                    </a:p>
+                  </a:txBody>
+                  <a:tcPr>
+                    <a:solidFill>
+                      <a:srgbClr val="F2F4F8"/>
+                    </a:solidFill>
+                  </a:tcPr>
+                </a:tc>
+                <a:tc>
+                  <a:txBody>
+                    <a:bodyPr/>
+                    <a:lstStyle/>
+                    <a:p>
+                      <a:r>
+                        <a:rPr sz="1000"/>
+                        <a:t>100%</a:t>
+                      </a:r>
+                    </a:p>
+                  </a:txBody>
+                  <a:tcPr>
+                    <a:solidFill>
+                      <a:srgbClr val="F2F4F8"/>
+                    </a:solidFill>
+                  </a:tcPr>
+                </a:tc>
+              </a:tr>
+              <a:tr h="269507">
+                <a:tc>
+                  <a:txBody>
+                    <a:bodyPr/>
+                    <a:lstStyle/>
+                    <a:p>
+                      <a:r>
+                        <a:rPr sz="1000" b="1">
+                          <a:solidFill>
+                            <a:srgbClr val="1E8A3C"/>
+                          </a:solidFill>
+                        </a:rPr>
+                        <a:t>12</a:t>
+                      </a:r>
+                    </a:p>
+                  </a:txBody>
+                  <a:tcPr>
+                    <a:solidFill>
+                      <a:srgbClr val="FFFFFF"/>
+                    </a:solidFill>
+                  </a:tcPr>
+                </a:tc>
+                <a:tc>
+                  <a:txBody>
+                    <a:bodyPr/>
+                    <a:lstStyle/>
+                    <a:p>
+                      <a:r>
+                        <a:rPr sz="1000"/>
+                        <a:t>Класс корп. обучения №2</a:t>
+                      </a:r>
+                    </a:p>
+                  </a:txBody>
+                  <a:tcPr>
+                    <a:solidFill>
+                      <a:srgbClr val="FFFFFF"/>
+                    </a:solidFill>
+                  </a:tcPr>
+                </a:tc>
+                <a:tc>
+                  <a:txBody>
+                    <a:bodyPr/>
+                    <a:lstStyle/>
+                    <a:p>
+                      <a:r>
+                        <a:rPr sz="1000"/>
+                        <a:t>85</a:t>
+                      </a:r>
+                    </a:p>
+                  </a:txBody>
+                  <a:tcPr>
+                    <a:solidFill>
+                      <a:srgbClr val="FFFFFF"/>
+                    </a:solidFill>
+                  </a:tcPr>
+                </a:tc>
+                <a:tc>
+                  <a:txBody>
+                    <a:bodyPr/>
+                    <a:lstStyle/>
+                    <a:p>
+                      <a:r>
+                        <a:rPr sz="1000"/>
+                        <a:t>AP-12w</a:t>
+                      </a:r>
+                    </a:p>
+                  </a:txBody>
+                  <a:tcPr>
+                    <a:solidFill>
+                      <a:srgbClr val="FFFFFF"/>
+                    </a:solidFill>
+                  </a:tcPr>
+                </a:tc>
+                <a:tc>
+                  <a:txBody>
+                    <a:bodyPr/>
+                    <a:lstStyle/>
+                    <a:p>
+                      <a:r>
+                        <a:rPr sz="1000"/>
+                        <a:t>-32</a:t>
+                      </a:r>
+                    </a:p>
+                  </a:txBody>
+                  <a:tcPr>
+                    <a:solidFill>
+                      <a:srgbClr val="FFFFFF"/>
+                    </a:solidFill>
+                  </a:tcPr>
+                </a:tc>
+                <a:tc>
+                  <a:txBody>
+                    <a:bodyPr/>
+                    <a:lstStyle/>
+                    <a:p>
+                      <a:r>
+                        <a:rPr sz="1000"/>
+                        <a:t>-56</a:t>
+                      </a:r>
+                    </a:p>
+                  </a:txBody>
+                  <a:tcPr>
+                    <a:solidFill>
+                      <a:srgbClr val="FFFFFF"/>
+                    </a:solidFill>
+                  </a:tcPr>
+                </a:tc>
+                <a:tc>
+                  <a:txBody>
+                    <a:bodyPr/>
+                    <a:lstStyle/>
+                    <a:p>
+                      <a:r>
+                        <a:rPr sz="1000"/>
+                        <a:t>100%</a:t>
+                      </a:r>
+                    </a:p>
+                  </a:txBody>
+                  <a:tcPr>
+                    <a:solidFill>
+                      <a:srgbClr val="FFFFFF"/>
+                    </a:solidFill>
+                  </a:tcPr>
+                </a:tc>
+                <a:tc>
+                  <a:txBody>
+                    <a:bodyPr/>
+                    <a:lstStyle/>
+                    <a:p>
+                      <a:r>
+                        <a:rPr sz="1000"/>
+                        <a:t>-41</a:t>
+                      </a:r>
+                    </a:p>
+                  </a:txBody>
+                  <a:tcPr>
+                    <a:solidFill>
+                      <a:srgbClr val="FFFFFF"/>
+                    </a:solidFill>
+                  </a:tcPr>
+                </a:tc>
+                <a:tc>
+                  <a:txBody>
+                    <a:bodyPr/>
+                    <a:lstStyle/>
+                    <a:p>
+                      <a:r>
+                        <a:rPr sz="1000"/>
+                        <a:t>-76</a:t>
+                      </a:r>
+                    </a:p>
+                  </a:txBody>
+                  <a:tcPr>
+                    <a:solidFill>
+                      <a:srgbClr val="FFFFFF"/>
+                    </a:solidFill>
+                  </a:tcPr>
+                </a:tc>
+                <a:tc>
+                  <a:txBody>
+                    <a:bodyPr/>
+                    <a:lstStyle/>
+                    <a:p>
+                      <a:r>
+                        <a:rPr sz="1000"/>
+                        <a:t>100%</a:t>
+                      </a:r>
+                    </a:p>
+                  </a:txBody>
+                  <a:tcPr>
+                    <a:solidFill>
+                      <a:srgbClr val="FFFFFF"/>
+                    </a:solidFill>
+                  </a:tcPr>
+                </a:tc>
+              </a:tr>
+              <a:tr h="269507">
+                <a:tc>
+                  <a:txBody>
+                    <a:bodyPr/>
+                    <a:lstStyle/>
+                    <a:p>
+                      <a:r>
+                        <a:rPr sz="1000" b="1">
+                          <a:solidFill>
+                            <a:srgbClr val="1E8A3C"/>
+                          </a:solidFill>
+                        </a:rPr>
+                        <a:t>13</a:t>
+                      </a:r>
+                    </a:p>
+                  </a:txBody>
+                  <a:tcPr>
+                    <a:solidFill>
+                      <a:srgbClr val="F2F4F8"/>
+                    </a:solidFill>
+                  </a:tcPr>
+                </a:tc>
+                <a:tc>
+                  <a:txBody>
+                    <a:bodyPr/>
+                    <a:lstStyle/>
+                    <a:p>
+                      <a:r>
+                        <a:rPr sz="1000"/>
+                        <a:t>Класс корп. обучения №1</a:t>
+                      </a:r>
+                    </a:p>
+                  </a:txBody>
+                  <a:tcPr>
+                    <a:solidFill>
+                      <a:srgbClr val="F2F4F8"/>
+                    </a:solidFill>
+                  </a:tcPr>
+                </a:tc>
+                <a:tc>
+                  <a:txBody>
+                    <a:bodyPr/>
+                    <a:lstStyle/>
+                    <a:p>
+                      <a:r>
+                        <a:rPr sz="1000"/>
+                        <a:t>96</a:t>
+                      </a:r>
+                    </a:p>
+                  </a:txBody>
+                  <a:tcPr>
+                    <a:solidFill>
+                      <a:srgbClr val="F2F4F8"/>
+                    </a:solidFill>
+                  </a:tcPr>
+                </a:tc>
+                <a:tc>
+                  <a:txBody>
+                    <a:bodyPr/>
+                    <a:lstStyle/>
+                    <a:p>
+                      <a:r>
+                        <a:rPr sz="1000"/>
+                        <a:t>AP-13</a:t>
+                      </a:r>
+                    </a:p>
+                  </a:txBody>
+                  <a:tcPr>
+                    <a:solidFill>
+                      <a:srgbClr val="F2F4F8"/>
+                    </a:solidFill>
+                  </a:tcPr>
+                </a:tc>
+                <a:tc>
+                  <a:txBody>
+                    <a:bodyPr/>
+                    <a:lstStyle/>
+                    <a:p>
+                      <a:r>
+                        <a:rPr sz="1000"/>
+                        <a:t>-35</a:t>
+                      </a:r>
+                    </a:p>
+                  </a:txBody>
+                  <a:tcPr>
+                    <a:solidFill>
+                      <a:srgbClr val="F2F4F8"/>
+                    </a:solidFill>
+                  </a:tcPr>
+                </a:tc>
+                <a:tc>
+                  <a:txBody>
+                    <a:bodyPr/>
+                    <a:lstStyle/>
+                    <a:p>
+                      <a:r>
+                        <a:rPr sz="1000"/>
+                        <a:t>-45</a:t>
+                      </a:r>
+                    </a:p>
+                  </a:txBody>
+                  <a:tcPr>
+                    <a:solidFill>
+                      <a:srgbClr val="F2F4F8"/>
+                    </a:solidFill>
+                  </a:tcPr>
+                </a:tc>
+                <a:tc>
+                  <a:txBody>
+                    <a:bodyPr/>
+                    <a:lstStyle/>
+                    <a:p>
+                      <a:r>
+                        <a:rPr sz="1000"/>
+                        <a:t>100%</a:t>
+                      </a:r>
+                    </a:p>
+                  </a:txBody>
+                  <a:tcPr>
+                    <a:solidFill>
+                      <a:srgbClr val="F2F4F8"/>
+                    </a:solidFill>
+                  </a:tcPr>
+                </a:tc>
+                <a:tc>
+                  <a:txBody>
+                    <a:bodyPr/>
+                    <a:lstStyle/>
+                    <a:p>
+                      <a:r>
+                        <a:rPr sz="1000"/>
+                        <a:t>-44</a:t>
+                      </a:r>
+                    </a:p>
+                  </a:txBody>
+                  <a:tcPr>
+                    <a:solidFill>
+                      <a:srgbClr val="F2F4F8"/>
+                    </a:solidFill>
+                  </a:tcPr>
+                </a:tc>
+                <a:tc>
+                  <a:txBody>
+                    <a:bodyPr/>
+                    <a:lstStyle/>
+                    <a:p>
+                      <a:r>
+                        <a:rPr sz="1000"/>
+                        <a:t>-57</a:t>
+                      </a:r>
+                    </a:p>
+                  </a:txBody>
+                  <a:tcPr>
+                    <a:solidFill>
+                      <a:srgbClr val="F2F4F8"/>
+                    </a:solidFill>
+                  </a:tcPr>
+                </a:tc>
+                <a:tc>
+                  <a:txBody>
+                    <a:bodyPr/>
+                    <a:lstStyle/>
+                    <a:p>
+                      <a:r>
+                        <a:rPr sz="1000"/>
+                        <a:t>100%</a:t>
+                      </a:r>
+                    </a:p>
+                  </a:txBody>
+                  <a:tcPr>
+                    <a:solidFill>
+                      <a:srgbClr val="F2F4F8"/>
+                    </a:solidFill>
+                  </a:tcPr>
+                </a:tc>
+              </a:tr>
+              <a:tr h="269507">
+                <a:tc>
+                  <a:txBody>
+                    <a:bodyPr/>
+                    <a:lstStyle/>
+                    <a:p>
+                      <a:r>
+                        <a:rPr sz="1000" b="1">
+                          <a:solidFill>
+                            <a:srgbClr val="1E8A3C"/>
+                          </a:solidFill>
+                        </a:rPr>
+                        <a:t>14</a:t>
+                      </a:r>
+                    </a:p>
+                  </a:txBody>
+                  <a:tcPr>
+                    <a:solidFill>
+                      <a:srgbClr val="FFFFFF"/>
+                    </a:solidFill>
+                  </a:tcPr>
+                </a:tc>
+                <a:tc>
+                  <a:txBody>
+                    <a:bodyPr/>
+                    <a:lstStyle/>
+                    <a:p>
+                      <a:r>
+                        <a:rPr sz="1000"/>
+                        <a:t>Серверная</a:t>
+                      </a:r>
+                    </a:p>
+                  </a:txBody>
+                  <a:tcPr>
+                    <a:solidFill>
+                      <a:srgbClr val="FFFFFF"/>
+                    </a:solidFill>
+                  </a:tcPr>
+                </a:tc>
+                <a:tc>
+                  <a:txBody>
+                    <a:bodyPr/>
+                    <a:lstStyle/>
+                    <a:p>
+                      <a:r>
+                        <a:rPr sz="1000"/>
+                        <a:t>5</a:t>
+                      </a:r>
+                    </a:p>
+                  </a:txBody>
+                  <a:tcPr>
+                    <a:solidFill>
+                      <a:srgbClr val="FFFFFF"/>
+                    </a:solidFill>
+                  </a:tcPr>
+                </a:tc>
+                <a:tc>
+                  <a:txBody>
+                    <a:bodyPr/>
+                    <a:lstStyle/>
+                    <a:p>
+                      <a:r>
+                        <a:rPr sz="1000"/>
+                        <a:t>AP-2</a:t>
+                      </a:r>
+                    </a:p>
+                  </a:txBody>
+                  <a:tcPr>
+                    <a:solidFill>
+                      <a:srgbClr val="FFFFFF"/>
+                    </a:solidFill>
+                  </a:tcPr>
+                </a:tc>
+                <a:tc>
+                  <a:txBody>
+                    <a:bodyPr/>
+                    <a:lstStyle/>
+                    <a:p>
+                      <a:r>
+                        <a:rPr sz="1000"/>
+                        <a:t>-63</a:t>
+                      </a:r>
+                    </a:p>
+                  </a:txBody>
+                  <a:tcPr>
+                    <a:solidFill>
+                      <a:srgbClr val="FFFFFF"/>
+                    </a:solidFill>
+                  </a:tcPr>
+                </a:tc>
+                <a:tc>
+                  <a:txBody>
+                    <a:bodyPr/>
+                    <a:lstStyle/>
+                    <a:p>
+                      <a:r>
+                        <a:rPr sz="1000"/>
+                        <a:t>-66</a:t>
+                      </a:r>
+                    </a:p>
+                  </a:txBody>
+                  <a:tcPr>
+                    <a:solidFill>
+                      <a:srgbClr val="FFFFFF"/>
+                    </a:solidFill>
+                  </a:tcPr>
+                </a:tc>
+                <a:tc>
+                  <a:txBody>
+                    <a:bodyPr/>
+                    <a:lstStyle/>
+                    <a:p>
+                      <a:r>
+                        <a:rPr sz="1000"/>
+                        <a:t>100%</a:t>
+                      </a:r>
+                    </a:p>
+                  </a:txBody>
+                  <a:tcPr>
+                    <a:solidFill>
+                      <a:srgbClr val="FFFFFF"/>
+                    </a:solidFill>
+                  </a:tcPr>
+                </a:tc>
+                <a:tc>
+                  <a:txBody>
+                    <a:bodyPr/>
+                    <a:lstStyle/>
+                    <a:p>
+                      <a:r>
+                        <a:rPr sz="1000"/>
+                        <a:t>-89</a:t>
+                      </a:r>
+                    </a:p>
+                  </a:txBody>
+                  <a:tcPr>
+                    <a:solidFill>
+                      <a:srgbClr val="FFFFFF"/>
+                    </a:solidFill>
+                  </a:tcPr>
+                </a:tc>
+                <a:tc>
+                  <a:txBody>
+                    <a:bodyPr/>
+                    <a:lstStyle/>
+                    <a:p>
+                      <a:r>
+                        <a:rPr sz="1000"/>
+                        <a:t>-93</a:t>
+                      </a:r>
+                    </a:p>
+                  </a:txBody>
+                  <a:tcPr>
+                    <a:solidFill>
+                      <a:srgbClr val="FFFFFF"/>
+                    </a:solidFill>
+                  </a:tcPr>
+                </a:tc>
+                <a:tc>
+                  <a:txBody>
+                    <a:bodyPr/>
+                    <a:lstStyle/>
+                    <a:p>
+                      <a:r>
+                        <a:rPr sz="1000">
+                          <a:solidFill>
+                            <a:srgbClr val="C02626"/>
+                          </a:solidFill>
+                        </a:rPr>
+                        <a:t>0%</a:t>
+                      </a:r>
+                    </a:p>
+                  </a:txBody>
+                  <a:tcPr>
+                    <a:solidFill>
+                      <a:srgbClr val="FFFFFF"/>
+                    </a:solidFill>
+                  </a:tcPr>
+                </a:tc>
+              </a:tr>
+              <a:tr h="269507">
+                <a:tc>
+                  <a:txBody>
+                    <a:bodyPr/>
+                    <a:lstStyle/>
+                    <a:p>
+                      <a:r>
+                        <a:rPr sz="1000" b="1">
+                          <a:solidFill>
+                            <a:srgbClr val="1E8A3C"/>
+                          </a:solidFill>
+                        </a:rPr>
+                        <a:t>15</a:t>
+                      </a:r>
+                    </a:p>
+                  </a:txBody>
+                  <a:tcPr>
+                    <a:solidFill>
+                      <a:srgbClr val="F2F4F8"/>
+                    </a:solidFill>
+                  </a:tcPr>
+                </a:tc>
+                <a:tc>
+                  <a:txBody>
+                    <a:bodyPr/>
+                    <a:lstStyle/>
+                    <a:p>
+                      <a:r>
+                        <a:rPr sz="1000"/>
+                        <a:t>Электрощитовая</a:t>
+                      </a:r>
+                    </a:p>
+                  </a:txBody>
+                  <a:tcPr>
+                    <a:solidFill>
+                      <a:srgbClr val="F2F4F8"/>
+                    </a:solidFill>
+                  </a:tcPr>
+                </a:tc>
+                <a:tc>
+                  <a:txBody>
+                    <a:bodyPr/>
+                    <a:lstStyle/>
+                    <a:p>
+                      <a:r>
+                        <a:rPr sz="1000"/>
+                        <a:t>6</a:t>
+                      </a:r>
+                    </a:p>
+                  </a:txBody>
+                  <a:tcPr>
+                    <a:solidFill>
+                      <a:srgbClr val="F2F4F8"/>
+                    </a:solidFill>
+                  </a:tcPr>
+                </a:tc>
+                <a:tc>
+                  <a:txBody>
+                    <a:bodyPr/>
+                    <a:lstStyle/>
+                    <a:p>
+                      <a:r>
+                        <a:rPr sz="1000"/>
+                        <a:t>AP-13</a:t>
+                      </a:r>
+                    </a:p>
+                  </a:txBody>
+                  <a:tcPr>
+                    <a:solidFill>
+                      <a:srgbClr val="F2F4F8"/>
+                    </a:solidFill>
+                  </a:tcPr>
+                </a:tc>
+                <a:tc>
+                  <a:txBody>
+                    <a:bodyPr/>
+                    <a:lstStyle/>
+                    <a:p>
+                      <a:r>
+                        <a:rPr sz="1000"/>
+                        <a:t>-67</a:t>
+                      </a:r>
+                    </a:p>
+                  </a:txBody>
+                  <a:tcPr>
+                    <a:solidFill>
+                      <a:srgbClr val="F2F4F8"/>
+                    </a:solidFill>
+                  </a:tcPr>
+                </a:tc>
+                <a:tc>
+                  <a:txBody>
+                    <a:bodyPr/>
+                    <a:lstStyle/>
+                    <a:p>
+                      <a:r>
+                        <a:rPr sz="1000"/>
+                        <a:t>-68</a:t>
+                      </a:r>
+                    </a:p>
+                  </a:txBody>
+                  <a:tcPr>
+                    <a:solidFill>
+                      <a:srgbClr val="F2F4F8"/>
+                    </a:solidFill>
+                  </a:tcPr>
+                </a:tc>
+                <a:tc>
+                  <a:txBody>
+                    <a:bodyPr/>
+                    <a:lstStyle/>
+                    <a:p>
+                      <a:r>
+                        <a:rPr sz="1000"/>
+                        <a:t>100%</a:t>
+                      </a:r>
+                    </a:p>
+                  </a:txBody>
+                  <a:tcPr>
+                    <a:solidFill>
+                      <a:srgbClr val="F2F4F8"/>
+                    </a:solidFill>
+                  </a:tcPr>
+                </a:tc>
+                <a:tc>
+                  <a:txBody>
+                    <a:bodyPr/>
+                    <a:lstStyle/>
+                    <a:p>
+                      <a:r>
+                        <a:rPr sz="1000"/>
+                        <a:t>-94</a:t>
+                      </a:r>
+                    </a:p>
+                  </a:txBody>
+                  <a:tcPr>
+                    <a:solidFill>
+                      <a:srgbClr val="F2F4F8"/>
+                    </a:solidFill>
+                  </a:tcPr>
+                </a:tc>
+                <a:tc>
+                  <a:txBody>
+                    <a:bodyPr/>
+                    <a:lstStyle/>
+                    <a:p>
+                      <a:r>
+                        <a:rPr sz="1000"/>
+                        <a:t>-96</a:t>
+                      </a:r>
+                    </a:p>
+                  </a:txBody>
+                  <a:tcPr>
+                    <a:solidFill>
+                      <a:srgbClr val="F2F4F8"/>
+                    </a:solidFill>
+                  </a:tcPr>
+                </a:tc>
+                <a:tc>
+                  <a:txBody>
+                    <a:bodyPr/>
+                    <a:lstStyle/>
+                    <a:p>
+                      <a:r>
+                        <a:rPr sz="1000">
+                          <a:solidFill>
+                            <a:srgbClr val="C02626"/>
+                          </a:solidFill>
+                        </a:rPr>
+                        <a:t>0%</a:t>
+                      </a:r>
+                    </a:p>
+                  </a:txBody>
+                  <a:tcPr>
+                    <a:solidFill>
+                      <a:srgbClr val="F2F4F8"/>
+                    </a:solidFill>
+                  </a:tcPr>
+                </a:tc>
+              </a:tr>
+              <a:tr h="269507">
+                <a:tc>
+                  <a:txBody>
+                    <a:bodyPr/>
+                    <a:lstStyle/>
+                    <a:p>
+                      <a:r>
+                        <a:rPr sz="1000" b="1">
+                          <a:solidFill>
+                            <a:srgbClr val="1E8A3C"/>
+                          </a:solidFill>
+                        </a:rPr>
+                        <a:t>16</a:t>
+                      </a:r>
+                    </a:p>
+                  </a:txBody>
+                  <a:tcPr>
+                    <a:solidFill>
+                      <a:srgbClr val="FFFFFF"/>
+                    </a:solidFill>
+                  </a:tcPr>
+                </a:tc>
+                <a:tc>
+                  <a:txBody>
+                    <a:bodyPr/>
+                    <a:lstStyle/>
+                    <a:p>
+                      <a:r>
+                        <a:rPr sz="1000"/>
+                        <a:t>Склад-Архив УТЦ</a:t>
+                      </a:r>
+                    </a:p>
+                  </a:txBody>
+                  <a:tcPr>
+                    <a:solidFill>
+                      <a:srgbClr val="FFFFFF"/>
+                    </a:solidFill>
+                  </a:tcPr>
+                </a:tc>
+                <a:tc>
+                  <a:txBody>
+                    <a:bodyPr/>
+                    <a:lstStyle/>
+                    <a:p>
+                      <a:r>
+                        <a:rPr sz="1000"/>
+                        <a:t>11</a:t>
+                      </a:r>
+                    </a:p>
+                  </a:txBody>
+                  <a:tcPr>
+                    <a:solidFill>
+                      <a:srgbClr val="FFFFFF"/>
+                    </a:solidFill>
+                  </a:tcPr>
+                </a:tc>
+                <a:tc>
+                  <a:txBody>
+                    <a:bodyPr/>
+                    <a:lstStyle/>
+                    <a:p>
+                      <a:r>
+                        <a:rPr sz="1000"/>
+                        <a:t>AP-13</a:t>
+                      </a:r>
+                    </a:p>
+                  </a:txBody>
+                  <a:tcPr>
+                    <a:solidFill>
+                      <a:srgbClr val="FFFFFF"/>
+                    </a:solidFill>
+                  </a:tcPr>
+                </a:tc>
+                <a:tc>
+                  <a:txBody>
+                    <a:bodyPr/>
+                    <a:lstStyle/>
+                    <a:p>
+                      <a:r>
+                        <a:rPr sz="1000"/>
+                        <a:t>-51</a:t>
+                      </a:r>
+                    </a:p>
+                  </a:txBody>
+                  <a:tcPr>
+                    <a:solidFill>
+                      <a:srgbClr val="FFFFFF"/>
+                    </a:solidFill>
+                  </a:tcPr>
+                </a:tc>
+                <a:tc>
+                  <a:txBody>
+                    <a:bodyPr/>
+                    <a:lstStyle/>
+                    <a:p>
+                      <a:r>
+                        <a:rPr sz="1000"/>
+                        <a:t>-54</a:t>
+                      </a:r>
+                    </a:p>
+                  </a:txBody>
+                  <a:tcPr>
+                    <a:solidFill>
+                      <a:srgbClr val="FFFFFF"/>
+                    </a:solidFill>
+                  </a:tcPr>
+                </a:tc>
+                <a:tc>
+                  <a:txBody>
+                    <a:bodyPr/>
+                    <a:lstStyle/>
+                    <a:p>
+                      <a:r>
+                        <a:rPr sz="1000"/>
+                        <a:t>100%</a:t>
+                      </a:r>
+                    </a:p>
+                  </a:txBody>
+                  <a:tcPr>
+                    <a:solidFill>
+                      <a:srgbClr val="FFFFFF"/>
+                    </a:solidFill>
+                  </a:tcPr>
+                </a:tc>
+                <a:tc>
+                  <a:txBody>
+                    <a:bodyPr/>
+                    <a:lstStyle/>
+                    <a:p>
+                      <a:r>
+                        <a:rPr sz="1000"/>
+                        <a:t>-70</a:t>
+                      </a:r>
+                    </a:p>
+                  </a:txBody>
+                  <a:tcPr>
+                    <a:solidFill>
+                      <a:srgbClr val="FFFFFF"/>
+                    </a:solidFill>
+                  </a:tcPr>
+                </a:tc>
+                <a:tc>
+                  <a:txBody>
+                    <a:bodyPr/>
+                    <a:lstStyle/>
+                    <a:p>
+                      <a:r>
+                        <a:rPr sz="1000"/>
+                        <a:t>-72</a:t>
+                      </a:r>
+                    </a:p>
+                  </a:txBody>
+                  <a:tcPr>
+                    <a:solidFill>
+                      <a:srgbClr val="FFFFFF"/>
+                    </a:solidFill>
+                  </a:tcPr>
+                </a:tc>
+                <a:tc>
+                  <a:txBody>
+                    <a:bodyPr/>
+                    <a:lstStyle/>
+                    <a:p>
+                      <a:r>
+                        <a:rPr sz="1000">
+                          <a:solidFill>
+                            <a:srgbClr val="C87A00"/>
+                          </a:solidFill>
+                        </a:rPr>
+                        <a:t>58%</a:t>
+                      </a:r>
+                    </a:p>
+                  </a:txBody>
+                  <a:tcPr>
+                    <a:solidFill>
+                      <a:srgbClr val="FFFFFF"/>
+                    </a:solidFill>
+                  </a:tcPr>
+                </a:tc>
+              </a:tr>
+              <a:tr h="269507">
+                <a:tc>
+                  <a:txBody>
+                    <a:bodyPr/>
+                    <a:lstStyle/>
+                    <a:p>
+                      <a:r>
+                        <a:rPr sz="1000" b="1">
+                          <a:solidFill>
+                            <a:srgbClr val="1E8A3C"/>
+                          </a:solidFill>
+                        </a:rPr>
+                        <a:t>17</a:t>
+                      </a:r>
+                    </a:p>
+                  </a:txBody>
+                  <a:tcPr>
+                    <a:solidFill>
+                      <a:srgbClr val="F2F4F8"/>
+                    </a:solidFill>
+                  </a:tcPr>
+                </a:tc>
+                <a:tc>
+                  <a:txBody>
+                    <a:bodyPr/>
+                    <a:lstStyle/>
+                    <a:p>
+                      <a:r>
+                        <a:rPr sz="1000"/>
+                        <a:t>ИТП</a:t>
+                      </a:r>
+                    </a:p>
+                  </a:txBody>
+                  <a:tcPr>
+                    <a:solidFill>
+                      <a:srgbClr val="F2F4F8"/>
+                    </a:solidFill>
+                  </a:tcPr>
+                </a:tc>
+                <a:tc>
+                  <a:txBody>
+                    <a:bodyPr/>
+                    <a:lstStyle/>
+                    <a:p>
+                      <a:r>
+                        <a:rPr sz="1000"/>
+                        <a:t>25</a:t>
+                      </a:r>
+                    </a:p>
+                  </a:txBody>
+                  <a:tcPr>
+                    <a:solidFill>
+                      <a:srgbClr val="F2F4F8"/>
+                    </a:solidFill>
+                  </a:tcPr>
+                </a:tc>
+                <a:tc>
+                  <a:txBody>
+                    <a:bodyPr/>
+                    <a:lstStyle/>
+                    <a:p>
+                      <a:r>
+                        <a:rPr sz="1000"/>
+                        <a:t>AP-13</a:t>
+                      </a:r>
+                    </a:p>
+                  </a:txBody>
+                  <a:tcPr>
+                    <a:solidFill>
+                      <a:srgbClr val="F2F4F8"/>
+                    </a:solidFill>
+                  </a:tcPr>
+                </a:tc>
+                <a:tc>
+                  <a:txBody>
+                    <a:bodyPr/>
+                    <a:lstStyle/>
+                    <a:p>
+                      <a:r>
+                        <a:rPr sz="1000"/>
+                        <a:t>-58</a:t>
+                      </a:r>
+                    </a:p>
+                  </a:txBody>
+                  <a:tcPr>
+                    <a:solidFill>
+                      <a:srgbClr val="F2F4F8"/>
+                    </a:solidFill>
+                  </a:tcPr>
+                </a:tc>
+                <a:tc>
+                  <a:txBody>
+                    <a:bodyPr/>
+                    <a:lstStyle/>
+                    <a:p>
+                      <a:r>
+                        <a:rPr sz="1000"/>
+                        <a:t>-81</a:t>
+                      </a:r>
+                    </a:p>
+                  </a:txBody>
+                  <a:tcPr>
+                    <a:solidFill>
+                      <a:srgbClr val="F2F4F8"/>
+                    </a:solidFill>
+                  </a:tcPr>
+                </a:tc>
+                <a:tc>
+                  <a:txBody>
+                    <a:bodyPr/>
+                    <a:lstStyle/>
+                    <a:p>
+                      <a:r>
+                        <a:rPr sz="1000"/>
+                        <a:t>99%</a:t>
+                      </a:r>
+                    </a:p>
+                  </a:txBody>
+                  <a:tcPr>
+                    <a:solidFill>
+                      <a:srgbClr val="F2F4F8"/>
+                    </a:solidFill>
+                  </a:tcPr>
+                </a:tc>
+                <a:tc>
+                  <a:txBody>
+                    <a:bodyPr/>
+                    <a:lstStyle/>
+                    <a:p>
+                      <a:r>
+                        <a:rPr sz="1000"/>
+                        <a:t>-79</a:t>
+                      </a:r>
+                    </a:p>
+                  </a:txBody>
+                  <a:tcPr>
+                    <a:solidFill>
+                      <a:srgbClr val="F2F4F8"/>
+                    </a:solidFill>
+                  </a:tcPr>
+                </a:tc>
+                <a:tc>
+                  <a:txBody>
+                    <a:bodyPr/>
+                    <a:lstStyle/>
+                    <a:p>
+                      <a:r>
+                        <a:rPr sz="1000"/>
+                        <a:t>-116</a:t>
+                      </a:r>
+                    </a:p>
+                  </a:txBody>
+                  <a:tcPr>
+                    <a:solidFill>
+                      <a:srgbClr val="F2F4F8"/>
+                    </a:solidFill>
+                  </a:tcPr>
+                </a:tc>
+                <a:tc>
+                  <a:txBody>
+                    <a:bodyPr/>
+                    <a:lstStyle/>
+                    <a:p>
+                      <a:r>
+                        <a:rPr sz="1000">
+                          <a:solidFill>
+                            <a:srgbClr val="C02626"/>
+                          </a:solidFill>
+                        </a:rPr>
+                        <a:t>0%</a:t>
+                      </a:r>
+                    </a:p>
+                  </a:txBody>
+                  <a:tcPr>
+                    <a:solidFill>
+                      <a:srgbClr val="F2F4F8"/>
+                    </a:solidFill>
+                  </a:tcPr>
+                </a:tc>
+              </a:tr>
+              <a:tr h="269514">
+                <a:tc>
+                  <a:txBody>
+                    <a:bodyPr/>
+                    <a:lstStyle/>
+                    <a:p>
+                      <a:r>
+                        <a:rPr sz="1000" b="1">
+                          <a:solidFill>
+                            <a:srgbClr val="1E8A3C"/>
+                          </a:solidFill>
+                        </a:rPr>
+                        <a:t>18</a:t>
+                      </a:r>
+                    </a:p>
+                  </a:txBody>
+                  <a:tcPr>
+                    <a:solidFill>
+                      <a:srgbClr val="FFFFFF"/>
+                    </a:solidFill>
+                  </a:tcPr>
+                </a:tc>
+                <a:tc>
+                  <a:txBody>
+                    <a:bodyPr/>
+                    <a:lstStyle/>
+                    <a:p>
+                      <a:r>
+                        <a:rPr sz="1000"/>
+                        <a:t>Коридор</a:t>
+                      </a:r>
+                    </a:p>
+                  </a:txBody>
+                  <a:tcPr>
+                    <a:solidFill>
+                      <a:srgbClr val="FFFFFF"/>
+                    </a:solidFill>
+                  </a:tcPr>
+                </a:tc>
+                <a:tc>
+                  <a:txBody>
+                    <a:bodyPr/>
+                    <a:lstStyle/>
+                    <a:p>
+                      <a:r>
+                        <a:rPr sz="1000"/>
+                        <a:t>90</a:t>
+                      </a:r>
+                    </a:p>
+                  </a:txBody>
+                  <a:tcPr>
+                    <a:solidFill>
+                      <a:srgbClr val="FFFFFF"/>
+                    </a:solidFill>
+                  </a:tcPr>
+                </a:tc>
+                <a:tc>
+                  <a:txBody>
+                    <a:bodyPr/>
+                    <a:lstStyle/>
+                    <a:p>
+                      <a:r>
+                        <a:rPr sz="1000"/>
+                        <a:t>AP-18e</a:t>
+                      </a:r>
+                    </a:p>
+                  </a:txBody>
+                  <a:tcPr>
+                    <a:solidFill>
+                      <a:srgbClr val="FFFFFF"/>
+                    </a:solidFill>
+                  </a:tcPr>
+                </a:tc>
+                <a:tc>
+                  <a:txBody>
+                    <a:bodyPr/>
+                    <a:lstStyle/>
+                    <a:p>
+                      <a:r>
+                        <a:rPr sz="1000"/>
+                        <a:t>-32</a:t>
+                      </a:r>
+                    </a:p>
+                  </a:txBody>
+                  <a:tcPr>
+                    <a:solidFill>
+                      <a:srgbClr val="FFFFFF"/>
+                    </a:solidFill>
+                  </a:tcPr>
+                </a:tc>
+                <a:tc>
+                  <a:txBody>
+                    <a:bodyPr/>
+                    <a:lstStyle/>
+                    <a:p>
+                      <a:r>
+                        <a:rPr sz="1000"/>
+                        <a:t>-58</a:t>
+                      </a:r>
+                    </a:p>
+                  </a:txBody>
+                  <a:tcPr>
+                    <a:solidFill>
+                      <a:srgbClr val="FFFFFF"/>
+                    </a:solidFill>
+                  </a:tcPr>
+                </a:tc>
+                <a:tc>
+                  <a:txBody>
+                    <a:bodyPr/>
+                    <a:lstStyle/>
+                    <a:p>
+                      <a:r>
+                        <a:rPr sz="1000"/>
+                        <a:t>100%</a:t>
+                      </a:r>
+                    </a:p>
+                  </a:txBody>
+                  <a:tcPr>
+                    <a:solidFill>
+                      <a:srgbClr val="FFFFFF"/>
+                    </a:solidFill>
+                  </a:tcPr>
+                </a:tc>
+                <a:tc>
+                  <a:txBody>
+                    <a:bodyPr/>
+                    <a:lstStyle/>
+                    <a:p>
+                      <a:r>
+                        <a:rPr sz="1000"/>
+                        <a:t>-42</a:t>
+                      </a:r>
+                    </a:p>
+                  </a:txBody>
+                  <a:tcPr>
+                    <a:solidFill>
+                      <a:srgbClr val="FFFFFF"/>
+                    </a:solidFill>
+                  </a:tcPr>
+                </a:tc>
+                <a:tc>
+                  <a:txBody>
+                    <a:bodyPr/>
+                    <a:lstStyle/>
+                    <a:p>
+                      <a:r>
+                        <a:rPr sz="1000"/>
+                        <a:t>-83</a:t>
+                      </a:r>
+                    </a:p>
+                  </a:txBody>
+                  <a:tcPr>
+                    <a:solidFill>
+                      <a:srgbClr val="FFFFFF"/>
+                    </a:solidFill>
+                  </a:tcPr>
+                </a:tc>
+                <a:tc>
+                  <a:txBody>
+                    <a:bodyPr/>
+                    <a:lstStyle/>
+                    <a:p>
+                      <a:r>
+                        <a:rPr sz="1000"/>
+                        <a:t>99%</a:t>
+                      </a:r>
+                    </a:p>
+                  </a:txBody>
+                  <a:tcPr>
+                    <a:solidFill>
+                      <a:srgbClr val="FFFFFF"/>
+                    </a:solidFill>
+                  </a:tcPr>
                 </a:tc>
               </a:tr>
             </a:tbl>
           </a:graphicData>
         </a:graphic>
       </p:graphicFrame>
+      <p:sp>
+        <p:nvSpPr>
+          <p:cNvPr id="5" name="TextBox 4"/>
+          <p:cNvSpPr txBox="1"/>
+          <p:nvPr/>
+        </p:nvSpPr>
+        <p:spPr>
+          <a:xfrm>
+            <a:off x="320040" y="6446520"/>
+            <a:ext cx="11521440" cy="365760"/>
+          </a:xfrm>
+          <a:prstGeom prst="rect">
+            <a:avLst/>
+          </a:prstGeom>
+          <a:noFill/>
+        </p:spPr>
+        <p:txBody>
+          <a:bodyPr wrap="square">
+            <a:spAutoFit/>
+          </a:bodyPr>
+          <a:lstStyle/>
+          <a:p>
+            <a:pPr>
+              <a:spcAft>
+                <a:spcPts val="400"/>
+              </a:spcAft>
+            </a:pPr>
+            <a:r>
+              <a:rPr sz="1100" b="0">
+                <a:solidFill>
+                  <a:srgbClr val="222A35"/>
+                </a:solidFill>
+              </a:rPr>
+              <a:t>№7–9, 14–17 — санитарные/технические помещения: Wi-Fi не нормируется, покрытие обеспечивается остаточно через двери.</a:t>
+            </a:r>
+          </a:p>
+        </p:txBody>
+      </p:sp>
     </p:spTree>
   </p:cSld>
   <p:clrMapOvr>
@@ -4447,33 +7841,51 @@
       <p:grpSpPr/>
       <p:sp>
         <p:nvSpPr>
-          <p:cNvPr id="2" name="TextBox 1"/>
-          <p:cNvSpPr txBox="1"/>
+          <p:cNvPr id="2" name="Rectangle 1"/>
+          <p:cNvSpPr/>
           <p:nvPr/>
         </p:nvSpPr>
         <p:spPr>
           <a:xfrm>
-            <a:off x="457200" y="228600"/>
-            <a:ext cx="11247120" cy="822960"/>
+            <a:off x="0" y="0"/>
+            <a:ext cx="12191695" cy="822960"/>
           </a:xfrm>
           <a:prstGeom prst="rect">
             <a:avLst/>
           </a:prstGeom>
-          <a:noFill/>
+          <a:solidFill>
+            <a:srgbClr val="0B3D91"/>
+          </a:solidFill>
+          <a:ln>
+            <a:noFill/>
+          </a:ln>
         </p:spPr>
+        <p:style>
+          <a:lnRef idx="1">
+            <a:schemeClr val="accent1"/>
+          </a:lnRef>
+          <a:fillRef idx="3">
+            <a:schemeClr val="accent1"/>
+          </a:fillRef>
+          <a:effectRef idx="2">
+            <a:schemeClr val="accent1"/>
+          </a:effectRef>
+          <a:fontRef idx="minor">
+            <a:schemeClr val="lt1"/>
+          </a:fontRef>
+        </p:style>
         <p:txBody>
-          <a:bodyPr wrap="none">
-            <a:spAutoFit/>
-          </a:bodyPr>
+          <a:bodyPr rtlCol="0" anchor="ctr" lIns="365760" tIns="109728"/>
           <a:lstStyle/>
           <a:p>
-            <a:r>
-              <a:rPr sz="2800" b="1">
+            <a:pPr algn="ctr"/>
+            <a:r>
+              <a:rPr sz="2400" b="1">
                 <a:solidFill>
-                  <a:srgbClr val="1F2A44"/>
+                  <a:srgbClr val="FFFFFF"/>
                 </a:solidFill>
               </a:rPr>
-              <a:t>Выводы и рекомендации</a:t>
+              <a:t>Комментарии по каждой точке доступа</a:t>
             </a:r>
           </a:p>
         </p:txBody>
@@ -4486,8 +7898,8 @@
         </p:nvSpPr>
         <p:spPr>
           <a:xfrm>
-            <a:off x="548640" y="1188720"/>
-            <a:ext cx="11247120" cy="5394960"/>
+            <a:off x="365760" y="1188720"/>
+            <a:ext cx="11430000" cy="5486400"/>
           </a:xfrm>
           <a:prstGeom prst="rect">
             <a:avLst/>
@@ -4500,52 +7912,365 @@
           </a:bodyPr>
           <a:lstStyle/>
           <a:p>
-            <a:pPr/>
-            <a:r>
-              <a:rPr sz="1500"/>
-              <a:t>• Достаточно 9 точек Eltex WEP-2AC Smart: все нормируемые помещения получают ≥ −60 дБм внутри своей зоны, 97,8% рабочих зон ≥ −70 дБм на 2,4 ГГц</a:t>
-            </a:r>
-          </a:p>
-          <a:p>
-            <a:pPr/>
-            <a:r>
-              <a:rPr sz="1500"/>
-              <a:t>• Железобетон с базальтовым наполнением — главный фактор: одна стена = −12 дБ (2,4) / −20 дБ (5). Размещать AP строго внутри помещений, а не в коридоре «на просвет»</a:t>
-            </a:r>
-          </a:p>
-          <a:p>
-            <a:pPr/>
-            <a:r>
-              <a:rPr sz="1500"/>
-              <a:t>• Большие залы (№12/13, 11,8×8,3 м) требуют двух сот — единый AP не проходит по ширине через колонны каркаса</a:t>
-            </a:r>
-          </a:p>
-          <a:p>
-            <a:pPr/>
-            <a:r>
-              <a:rPr sz="1500"/>
-              <a:t>• 5 ГГц использовать только в границах помещения установки AP; межкомнатный роуминг и IoT держать на 2,4 ГГц</a:t>
-            </a:r>
-          </a:p>
-          <a:p>
-            <a:pPr/>
-            <a:r>
-              <a:rPr sz="1500"/>
-              <a:t>• Питание: PoE 802.3af от коммутатора в серверной №14; трассы слаботока прокладывать в лотках над подвесным потолком, минуя ЖБ-перегородки</a:t>
-            </a:r>
-          </a:p>
-          <a:p>
-            <a:pPr/>
-            <a:r>
-              <a:rPr sz="1500"/>
-              <a:t>• После монтажа — активное радиообследование (in-site survey) и настройка мощностей: соседние соты должны перекрываться на уровне ≤ −72 дБм</a:t>
-            </a:r>
-          </a:p>
-          <a:p>
-            <a:pPr/>
-            <a:r>
-              <a:rPr sz="1500"/>
-              <a:t>• Резерв ёмкости: в классах №3 и №12 при &gt;50 клиентов добавить вторую радиокарту/AP на 5 ГГц (WEP-2AC Smart поддерживает concurrent)</a:t>
+            <a:pPr>
+              <a:spcAft>
+                <a:spcPts val="400"/>
+              </a:spcAft>
+            </a:pPr>
+            <a:r>
+              <a:rPr sz="1250" b="0">
+                <a:solidFill>
+                  <a:srgbClr val="222A35"/>
+                </a:solidFill>
+              </a:rPr>
+              <a:t>AP-1 — Кабинет специалистов УТЦ (№1, 31 м²) — центр помещения; покрывает также серверную №14 через дверь (−63…−66 дБм).</a:t>
+            </a:r>
+          </a:p>
+          <a:p>
+            <a:pPr>
+              <a:spcAft>
+                <a:spcPts val="400"/>
+              </a:spcAft>
+            </a:pPr>
+            <a:r>
+              <a:rPr sz="1250" b="0">
+                <a:solidFill>
+                  <a:srgbClr val="222A35"/>
+                </a:solidFill>
+              </a:rPr>
+              <a:t>AP-2 — Кабинет преподавателей (№2, 15 м²) — единственный AP малой комнаты, резерв мощности в соседние классы не требуется.</a:t>
+            </a:r>
+          </a:p>
+          <a:p>
+            <a:pPr>
+              <a:spcAft>
+                <a:spcPts val="400"/>
+              </a:spcAft>
+            </a:pPr>
+            <a:r>
+              <a:rPr sz="1250" b="0">
+                <a:solidFill>
+                  <a:srgbClr val="222A35"/>
+                </a:solidFill>
+              </a:rPr>
+              <a:t>AP-3 — Класс ПК (№3, 87 м²) — плотная загрузка рабочих мест; один AP 2×2 ac держит −41 дБм в дальнем углу.</a:t>
+            </a:r>
+          </a:p>
+          <a:p>
+            <a:pPr>
+              <a:spcAft>
+                <a:spcPts val="400"/>
+              </a:spcAft>
+            </a:pPr>
+            <a:r>
+              <a:rPr sz="1250" b="0">
+                <a:solidFill>
+                  <a:srgbClr val="222A35"/>
+                </a:solidFill>
+              </a:rPr>
+              <a:t>AP-4 — Класс ТЭС УЭЦН (№4, 53 м²) — центр зала, стабильный 5 ГГц на всей площади.</a:t>
+            </a:r>
+          </a:p>
+          <a:p>
+            <a:pPr>
+              <a:spcAft>
+                <a:spcPts val="400"/>
+              </a:spcAft>
+            </a:pPr>
+            <a:r>
+              <a:rPr sz="1250" b="0">
+                <a:solidFill>
+                  <a:srgbClr val="222A35"/>
+                </a:solidFill>
+              </a:rPr>
+              <a:t>AP-5 — Класс корп. обучения №3 (№5, 54 м²) — аналогично AP-4.</a:t>
+            </a:r>
+          </a:p>
+          <a:p>
+            <a:pPr>
+              <a:spcAft>
+                <a:spcPts val="400"/>
+              </a:spcAft>
+            </a:pPr>
+            <a:r>
+              <a:rPr sz="1250" b="0">
+                <a:solidFill>
+                  <a:srgbClr val="222A35"/>
+                </a:solidFill>
+              </a:rPr>
+              <a:t>AP-6 — Гардероб (№6, 49 м²) — обеспечивает входную группу и смежный коридор со стороны запада.</a:t>
+            </a:r>
+          </a:p>
+          <a:p>
+            <a:pPr>
+              <a:spcAft>
+                <a:spcPts val="400"/>
+              </a:spcAft>
+            </a:pPr>
+            <a:r>
+              <a:rPr sz="1250" b="0">
+                <a:solidFill>
+                  <a:srgbClr val="222A35"/>
+                </a:solidFill>
+              </a:rPr>
+              <a:t>AP-12w — Запад класса №12 (85 м², 11,8×8,3 м) — ширина &gt; 8 м требует двух AP; служит источником покрытия для санузлов 7/8 и склада СИЗ №10.</a:t>
+            </a:r>
+          </a:p>
+          <a:p>
+            <a:pPr>
+              <a:spcAft>
+                <a:spcPts val="400"/>
+              </a:spcAft>
+            </a:pPr>
+            <a:r>
+              <a:rPr sz="1250" b="0">
+                <a:solidFill>
+                  <a:srgbClr val="222A35"/>
+                </a:solidFill>
+              </a:rPr>
+              <a:t>AP-12e — Восток класса №12 — стыкуется с AP-12w (перекрытие ~30%), снимает мёртвую зону у перегородки №12/№13.</a:t>
+            </a:r>
+          </a:p>
+          <a:p>
+            <a:pPr>
+              <a:spcAft>
+                <a:spcPts val="400"/>
+              </a:spcAft>
+            </a:pPr>
+            <a:r>
+              <a:rPr sz="1250" b="0">
+                <a:solidFill>
+                  <a:srgbClr val="222A35"/>
+                </a:solidFill>
+              </a:rPr>
+              <a:t>AP-13 — Класс корп. обучения №1 (№13, 96 м²) — центр; через одну стену даёт архиву №16 −51 дБм, щитовой №15 −67 дБм, ИТП №17 −59 дБм.</a:t>
+            </a:r>
+          </a:p>
+          <a:p>
+            <a:pPr>
+              <a:spcAft>
+                <a:spcPts val="400"/>
+              </a:spcAft>
+            </a:pPr>
+            <a:r>
+              <a:rPr sz="1250" b="0">
+                <a:solidFill>
+                  <a:srgbClr val="222A35"/>
+                </a:solidFill>
+              </a:rPr>
+              <a:t>AP-18w — Коридор, западная половина (№18, 90 м², 24×2,8 м) — протяжённое помещение: один AP не закрывает far-end; обслуживает раздевалку №11.</a:t>
+            </a:r>
+          </a:p>
+          <a:p>
+            <a:pPr>
+              <a:spcAft>
+                <a:spcPts val="400"/>
+              </a:spcAft>
+            </a:pPr>
+            <a:r>
+              <a:rPr sz="1250" b="0">
+                <a:solidFill>
+                  <a:srgbClr val="222A35"/>
+                </a:solidFill>
+              </a:rPr>
+              <a:t>AP-18e — Коридор, восточная половина — совместно с AP-18w даёт сквозной бесшовный роуминг по коридору (мин −57 дБм).</a:t>
+            </a:r>
+          </a:p>
+        </p:txBody>
+      </p:sp>
+    </p:spTree>
+  </p:cSld>
+  <p:clrMapOvr>
+    <a:masterClrMapping/>
+  </p:clrMapOvr>
+</p:sld>
+</file>
+
+<file path=ppt/slides/slide9.xml><?xml version="1.0" encoding="utf-8"?>
+<p:sld xmlns:a="http://schemas.openxmlformats.org/drawingml/2006/main" xmlns:p="http://schemas.openxmlformats.org/presentationml/2006/main" xmlns:r="http://schemas.openxmlformats.org/officeDocument/2006/relationships">
+  <p:cSld>
+    <p:spTree>
+      <p:nvGrpSpPr>
+        <p:cNvPr id="1" name=""/>
+        <p:cNvGrpSpPr/>
+        <p:nvPr/>
+      </p:nvGrpSpPr>
+      <p:grpSpPr/>
+      <p:sp>
+        <p:nvSpPr>
+          <p:cNvPr id="2" name="Rectangle 1"/>
+          <p:cNvSpPr/>
+          <p:nvPr/>
+        </p:nvSpPr>
+        <p:spPr>
+          <a:xfrm>
+            <a:off x="0" y="0"/>
+            <a:ext cx="12191695" cy="822960"/>
+          </a:xfrm>
+          <a:prstGeom prst="rect">
+            <a:avLst/>
+          </a:prstGeom>
+          <a:solidFill>
+            <a:srgbClr val="0B3D91"/>
+          </a:solidFill>
+          <a:ln>
+            <a:noFill/>
+          </a:ln>
+        </p:spPr>
+        <p:style>
+          <a:lnRef idx="1">
+            <a:schemeClr val="accent1"/>
+          </a:lnRef>
+          <a:fillRef idx="3">
+            <a:schemeClr val="accent1"/>
+          </a:fillRef>
+          <a:effectRef idx="2">
+            <a:schemeClr val="accent1"/>
+          </a:effectRef>
+          <a:fontRef idx="minor">
+            <a:schemeClr val="lt1"/>
+          </a:fontRef>
+        </p:style>
+        <p:txBody>
+          <a:bodyPr rtlCol="0" anchor="ctr" lIns="365760" tIns="109728"/>
+          <a:lstStyle/>
+          <a:p>
+            <a:pPr algn="ctr"/>
+            <a:r>
+              <a:rPr sz="2400" b="1">
+                <a:solidFill>
+                  <a:srgbClr val="FFFFFF"/>
+                </a:solidFill>
+              </a:rPr>
+              <a:t>Выводы и рекомендации</a:t>
+            </a:r>
+          </a:p>
+        </p:txBody>
+      </p:sp>
+      <p:sp>
+        <p:nvSpPr>
+          <p:cNvPr id="3" name="TextBox 2"/>
+          <p:cNvSpPr txBox="1"/>
+          <p:nvPr/>
+        </p:nvSpPr>
+        <p:spPr>
+          <a:xfrm>
+            <a:off x="457200" y="1280160"/>
+            <a:ext cx="11247120" cy="5120640"/>
+          </a:xfrm>
+          <a:prstGeom prst="rect">
+            <a:avLst/>
+          </a:prstGeom>
+          <a:noFill/>
+        </p:spPr>
+        <p:txBody>
+          <a:bodyPr wrap="square">
+            <a:spAutoFit/>
+          </a:bodyPr>
+          <a:lstStyle/>
+          <a:p>
+            <a:pPr>
+              <a:spcAft>
+                <a:spcPts val="400"/>
+              </a:spcAft>
+            </a:pPr>
+            <a:r>
+              <a:rPr sz="1400" b="1">
+                <a:solidFill>
+                  <a:srgbClr val="222A35"/>
+                </a:solidFill>
+              </a:rPr>
+              <a:t>✔ Принято 11 точек Eltex WEP-2AC Smart: 100% покрытие рабочих помещений на 2,4 ГГц (порог −70 дБм), 96,6% по зданию в целом.</a:t>
+            </a:r>
+          </a:p>
+          <a:p>
+            <a:pPr>
+              <a:spcAft>
+                <a:spcPts val="400"/>
+              </a:spcAft>
+            </a:pPr>
+            <a:r>
+              <a:rPr sz="1400" b="0">
+                <a:solidFill>
+                  <a:srgbClr val="222A35"/>
+                </a:solidFill>
+              </a:rPr>
+              <a:t>✔ 5 ГГц доступен на всей площади кабинетов и классов (средний уровень −30…−44 дБм); сквозь 2 ЖБ стены уровень падает ниже порога — поэтому клиентские устройства должны использовать band steering с приоритетом 5 ГГц только внутри своего помещения.</a:t>
+            </a:r>
+          </a:p>
+          <a:p>
+            <a:pPr>
+              <a:spcAft>
+                <a:spcPts val="400"/>
+              </a:spcAft>
+            </a:pPr>
+            <a:r>
+              <a:rPr sz="1400" b="1">
+                <a:solidFill>
+                  <a:srgbClr val="222A35"/>
+                </a:solidFill>
+              </a:rPr>
+              <a:t>Рекомендации по монтажу:</a:t>
+            </a:r>
+          </a:p>
+          <a:p>
+            <a:pPr>
+              <a:spcAft>
+                <a:spcPts val="400"/>
+              </a:spcAft>
+            </a:pPr>
+            <a:r>
+              <a:rPr sz="1400" b="0">
+                <a:solidFill>
+                  <a:srgbClr val="222A35"/>
+                </a:solidFill>
+              </a:rPr>
+              <a:t>• Крепление на потолок (высота 2,8–3,5 м под перекрытием), удалённость от ЖБ балок ≥ 1 м; питание PoE от коммутатора в серверной №14 (длина кабелей UTP ≤ 90 м).</a:t>
+            </a:r>
+          </a:p>
+          <a:p>
+            <a:pPr>
+              <a:spcAft>
+                <a:spcPts val="400"/>
+              </a:spcAft>
+            </a:pPr>
+            <a:r>
+              <a:rPr sz="1400" b="0">
+                <a:solidFill>
+                  <a:srgbClr val="222A35"/>
+                </a:solidFill>
+              </a:rPr>
+              <a:t>• Каналы: 2,4 ГГц — 1/6/11 по шахматному принципу; 5 ГГц — DFS-каналы, ширина 80 МГц в классах, 40 МГц в коридоре.</a:t>
+            </a:r>
+          </a:p>
+          <a:p>
+            <a:pPr>
+              <a:spcAft>
+                <a:spcPts val="400"/>
+              </a:spcAft>
+            </a:pPr>
+            <a:r>
+              <a:rPr sz="1400" b="0">
+                <a:solidFill>
+                  <a:srgbClr val="222A35"/>
+                </a:solidFill>
+              </a:rPr>
+              <a:t>• SSID единый, 802.11r/fast BSS transition для бесшовного роуминга в коридоре между AP-18w/e и классами.</a:t>
+            </a:r>
+          </a:p>
+          <a:p>
+            <a:pPr>
+              <a:spcAft>
+                <a:spcPts val="400"/>
+              </a:spcAft>
+            </a:pPr>
+            <a:r>
+              <a:rPr sz="1400" b="0">
+                <a:solidFill>
+                  <a:srgbClr val="222A35"/>
+                </a:solidFill>
+              </a:rPr>
+              <a:t>• После монтажа — контрольный радиообмер (Ekahau/WiFi Analyzer) по точкам с минимальным уровнем в каждом помещении.</a:t>
             </a:r>
           </a:p>
         </p:txBody>
